--- a/Task7/Лр7_KodusAI Небоваренков Зверь.pptx
+++ b/Task7/Лр7_KodusAI Небоваренков Зверь.pptx
@@ -5,7 +5,7 @@
     <p:sldMasterId id="2147483648" r:id="rId1"/>
   </p:sldMasterIdLst>
   <p:notesMasterIdLst>
-    <p:notesMasterId r:id="rId20"/>
+    <p:notesMasterId r:id="rId23"/>
   </p:notesMasterIdLst>
   <p:sldIdLst>
     <p:sldId id="257" r:id="rId2"/>
@@ -24,8 +24,11 @@
     <p:sldId id="267" r:id="rId15"/>
     <p:sldId id="268" r:id="rId16"/>
     <p:sldId id="269" r:id="rId17"/>
-    <p:sldId id="276" r:id="rId18"/>
-    <p:sldId id="280" r:id="rId19"/>
+    <p:sldId id="281" r:id="rId18"/>
+    <p:sldId id="283" r:id="rId19"/>
+    <p:sldId id="282" r:id="rId20"/>
+    <p:sldId id="276" r:id="rId21"/>
+    <p:sldId id="280" r:id="rId22"/>
   </p:sldIdLst>
   <p:sldSz cx="12192000" cy="6858000"/>
   <p:notesSz cx="6858000" cy="9144000"/>
@@ -214,7 +217,7 @@
           <a:p>
             <a:fld id="{B1C684E2-121A-4D6B-9071-5C929EF90B75}" type="datetimeFigureOut">
               <a:rPr lang="ru-RU" smtClean="0"/>
-              <a:t>06.04.2026</a:t>
+              <a:t>09.04.2026</a:t>
             </a:fld>
             <a:endParaRPr lang="ru-RU"/>
           </a:p>
@@ -572,6 +575,90 @@
 </p:notes>
 </file>
 
+<file path=ppt/notesSlides/notesSlide2.xml><?xml version="1.0" encoding="utf-8"?>
+<p:notes xmlns:a="http://schemas.openxmlformats.org/drawingml/2006/main" xmlns:r="http://schemas.openxmlformats.org/officeDocument/2006/relationships" xmlns:p="http://schemas.openxmlformats.org/presentationml/2006/main">
+  <p:cSld>
+    <p:spTree>
+      <p:nvGrpSpPr>
+        <p:cNvPr id="1" name=""/>
+        <p:cNvGrpSpPr/>
+        <p:nvPr/>
+      </p:nvGrpSpPr>
+      <p:grpSpPr>
+        <a:xfrm>
+          <a:off x="0" y="0"/>
+          <a:ext cx="0" cy="0"/>
+          <a:chOff x="0" y="0"/>
+          <a:chExt cx="0" cy="0"/>
+        </a:xfrm>
+      </p:grpSpPr>
+      <p:sp>
+        <p:nvSpPr>
+          <p:cNvPr id="2" name="Образ слайда 1"/>
+          <p:cNvSpPr>
+            <a:spLocks noGrp="1" noRot="1" noChangeAspect="1"/>
+          </p:cNvSpPr>
+          <p:nvPr>
+            <p:ph type="sldImg"/>
+          </p:nvPr>
+        </p:nvSpPr>
+        <p:spPr/>
+      </p:sp>
+      <p:sp>
+        <p:nvSpPr>
+          <p:cNvPr id="3" name="Заметки 2"/>
+          <p:cNvSpPr>
+            <a:spLocks noGrp="1"/>
+          </p:cNvSpPr>
+          <p:nvPr>
+            <p:ph type="body" idx="1"/>
+          </p:nvPr>
+        </p:nvSpPr>
+        <p:spPr/>
+        <p:txBody>
+          <a:bodyPr/>
+          <a:lstStyle/>
+          <a:p>
+            <a:endParaRPr lang="ru-RU" dirty="0"/>
+          </a:p>
+        </p:txBody>
+      </p:sp>
+      <p:sp>
+        <p:nvSpPr>
+          <p:cNvPr id="4" name="Номер слайда 3"/>
+          <p:cNvSpPr>
+            <a:spLocks noGrp="1"/>
+          </p:cNvSpPr>
+          <p:nvPr>
+            <p:ph type="sldNum" sz="quarter" idx="5"/>
+          </p:nvPr>
+        </p:nvSpPr>
+        <p:spPr/>
+        <p:txBody>
+          <a:bodyPr/>
+          <a:lstStyle/>
+          <a:p>
+            <a:fld id="{788D1AEF-DD74-4B85-93D8-3C2C0F18F670}" type="slidenum">
+              <a:rPr lang="ru-RU" smtClean="0"/>
+              <a:t>18</a:t>
+            </a:fld>
+            <a:endParaRPr lang="ru-RU"/>
+          </a:p>
+        </p:txBody>
+      </p:sp>
+    </p:spTree>
+    <p:extLst>
+      <p:ext uri="{BB962C8B-B14F-4D97-AF65-F5344CB8AC3E}">
+        <p14:creationId xmlns:p14="http://schemas.microsoft.com/office/powerpoint/2010/main" val="1639397218"/>
+      </p:ext>
+    </p:extLst>
+  </p:cSld>
+  <p:clrMapOvr>
+    <a:masterClrMapping/>
+  </p:clrMapOvr>
+</p:notes>
+</file>
+
 <file path=ppt/slideLayouts/slideLayout1.xml><?xml version="1.0" encoding="utf-8"?>
 <p:sldLayout xmlns:a="http://schemas.openxmlformats.org/drawingml/2006/main" xmlns:r="http://schemas.openxmlformats.org/officeDocument/2006/relationships" xmlns:p="http://schemas.openxmlformats.org/presentationml/2006/main" type="title" preserve="1">
   <p:cSld name="Титульный слайд">
@@ -701,7 +788,7 @@
           <a:p>
             <a:fld id="{B9D6247F-6AF4-4318-A27B-4F8FC20FB9AC}" type="datetime1">
               <a:rPr lang="ru-RU" smtClean="0"/>
-              <a:t>06.04.2026</a:t>
+              <a:t>09.04.2026</a:t>
             </a:fld>
             <a:endParaRPr lang="ru-RU"/>
           </a:p>
@@ -869,7 +956,7 @@
           <a:p>
             <a:fld id="{AF31D271-C6DA-48C3-BCC1-D133AD7203D4}" type="datetime1">
               <a:rPr lang="ru-RU" smtClean="0"/>
-              <a:t>06.04.2026</a:t>
+              <a:t>09.04.2026</a:t>
             </a:fld>
             <a:endParaRPr lang="ru-RU"/>
           </a:p>
@@ -1047,7 +1134,7 @@
           <a:p>
             <a:fld id="{A960878F-82B3-4277-A62B-1A7C958B7AFD}" type="datetime1">
               <a:rPr lang="ru-RU" smtClean="0"/>
-              <a:t>06.04.2026</a:t>
+              <a:t>09.04.2026</a:t>
             </a:fld>
             <a:endParaRPr lang="ru-RU"/>
           </a:p>
@@ -1215,7 +1302,7 @@
           <a:p>
             <a:fld id="{AF145611-9BEC-4F6E-A7A2-016B98ED9A5B}" type="datetime1">
               <a:rPr lang="ru-RU" smtClean="0"/>
-              <a:t>06.04.2026</a:t>
+              <a:t>09.04.2026</a:t>
             </a:fld>
             <a:endParaRPr lang="ru-RU"/>
           </a:p>
@@ -1460,7 +1547,7 @@
           <a:p>
             <a:fld id="{A2FEA4DD-3B4D-4EAE-9A17-ACA5EF5AE5AE}" type="datetime1">
               <a:rPr lang="ru-RU" smtClean="0"/>
-              <a:t>06.04.2026</a:t>
+              <a:t>09.04.2026</a:t>
             </a:fld>
             <a:endParaRPr lang="ru-RU"/>
           </a:p>
@@ -1689,7 +1776,7 @@
           <a:p>
             <a:fld id="{9264AF9E-18B6-4C53-A9EB-01F4D00D3082}" type="datetime1">
               <a:rPr lang="ru-RU" smtClean="0"/>
-              <a:t>06.04.2026</a:t>
+              <a:t>09.04.2026</a:t>
             </a:fld>
             <a:endParaRPr lang="ru-RU"/>
           </a:p>
@@ -2053,7 +2140,7 @@
           <a:p>
             <a:fld id="{8F55B0F0-0CD9-4813-B860-AB929393F0BC}" type="datetime1">
               <a:rPr lang="ru-RU" smtClean="0"/>
-              <a:t>06.04.2026</a:t>
+              <a:t>09.04.2026</a:t>
             </a:fld>
             <a:endParaRPr lang="ru-RU"/>
           </a:p>
@@ -2170,7 +2257,7 @@
           <a:p>
             <a:fld id="{8E5CD37D-B4E5-478E-B1C6-9811DB3A2BC3}" type="datetime1">
               <a:rPr lang="ru-RU" smtClean="0"/>
-              <a:t>06.04.2026</a:t>
+              <a:t>09.04.2026</a:t>
             </a:fld>
             <a:endParaRPr lang="ru-RU"/>
           </a:p>
@@ -2265,7 +2352,7 @@
           <a:p>
             <a:fld id="{B0455336-877F-4B9E-ABA0-711209675E90}" type="datetime1">
               <a:rPr lang="ru-RU" smtClean="0"/>
-              <a:t>06.04.2026</a:t>
+              <a:t>09.04.2026</a:t>
             </a:fld>
             <a:endParaRPr lang="ru-RU"/>
           </a:p>
@@ -2540,7 +2627,7 @@
           <a:p>
             <a:fld id="{4CD7FBEC-B4E5-42F6-9401-C269C822CB37}" type="datetime1">
               <a:rPr lang="ru-RU" smtClean="0"/>
-              <a:t>06.04.2026</a:t>
+              <a:t>09.04.2026</a:t>
             </a:fld>
             <a:endParaRPr lang="ru-RU"/>
           </a:p>
@@ -2792,7 +2879,7 @@
           <a:p>
             <a:fld id="{164E4ED0-DB39-4DEB-BDB8-65B049CA9302}" type="datetime1">
               <a:rPr lang="ru-RU" smtClean="0"/>
-              <a:t>06.04.2026</a:t>
+              <a:t>09.04.2026</a:t>
             </a:fld>
             <a:endParaRPr lang="ru-RU"/>
           </a:p>
@@ -3003,7 +3090,7 @@
           <a:p>
             <a:fld id="{7C87ADCC-E2E8-4FE7-9F77-8D106CD66237}" type="datetime1">
               <a:rPr lang="ru-RU" smtClean="0"/>
-              <a:t>06.04.2026</a:t>
+              <a:t>09.04.2026</a:t>
             </a:fld>
             <a:endParaRPr lang="ru-RU"/>
           </a:p>
@@ -4888,6 +4975,2790 @@
       </p:grpSpPr>
       <p:sp>
         <p:nvSpPr>
+          <p:cNvPr id="2" name="Заголовок 1">
+            <a:extLst>
+              <a:ext uri="{FF2B5EF4-FFF2-40B4-BE49-F238E27FC236}">
+                <a16:creationId xmlns:a16="http://schemas.microsoft.com/office/drawing/2014/main" id="{D356170E-AAEB-47D8-D7D2-D5D2C5DEDE1F}"/>
+              </a:ext>
+            </a:extLst>
+          </p:cNvPr>
+          <p:cNvSpPr>
+            <a:spLocks noGrp="1"/>
+          </p:cNvSpPr>
+          <p:nvPr>
+            <p:ph type="title"/>
+          </p:nvPr>
+        </p:nvSpPr>
+        <p:spPr>
+          <a:xfrm>
+            <a:off x="0" y="0"/>
+            <a:ext cx="12192000" cy="607027"/>
+          </a:xfrm>
+        </p:spPr>
+        <p:txBody>
+          <a:bodyPr>
+            <a:normAutofit fontScale="90000"/>
+          </a:bodyPr>
+          <a:lstStyle/>
+          <a:p>
+            <a:r>
+              <a:rPr lang="ru-RU" dirty="0"/>
+              <a:t>Таблица критических ошибок</a:t>
+            </a:r>
+          </a:p>
+        </p:txBody>
+      </p:sp>
+      <p:sp>
+        <p:nvSpPr>
+          <p:cNvPr id="3" name="Номер слайда 2">
+            <a:extLst>
+              <a:ext uri="{FF2B5EF4-FFF2-40B4-BE49-F238E27FC236}">
+                <a16:creationId xmlns:a16="http://schemas.microsoft.com/office/drawing/2014/main" id="{5D367B5A-6021-E1CE-85C1-D73934661E14}"/>
+              </a:ext>
+            </a:extLst>
+          </p:cNvPr>
+          <p:cNvSpPr>
+            <a:spLocks noGrp="1"/>
+          </p:cNvSpPr>
+          <p:nvPr>
+            <p:ph type="sldNum" sz="quarter" idx="12"/>
+          </p:nvPr>
+        </p:nvSpPr>
+        <p:spPr/>
+        <p:txBody>
+          <a:bodyPr/>
+          <a:lstStyle/>
+          <a:p>
+            <a:pPr algn="ctr"/>
+            <a:fld id="{68327A13-2E2F-4F2E-8A82-1D293133525B}" type="slidenum">
+              <a:rPr lang="ru-RU" smtClean="0"/>
+              <a:pPr algn="ctr"/>
+              <a:t>17</a:t>
+            </a:fld>
+            <a:endParaRPr lang="ru-RU"/>
+          </a:p>
+        </p:txBody>
+      </p:sp>
+      <p:graphicFrame>
+        <p:nvGraphicFramePr>
+          <p:cNvPr id="4" name="Таблица 4">
+            <a:extLst>
+              <a:ext uri="{FF2B5EF4-FFF2-40B4-BE49-F238E27FC236}">
+                <a16:creationId xmlns:a16="http://schemas.microsoft.com/office/drawing/2014/main" id="{F08C1867-3DD9-177B-D2D4-18E3687EF54A}"/>
+              </a:ext>
+            </a:extLst>
+          </p:cNvPr>
+          <p:cNvGraphicFramePr>
+            <a:graphicFrameLocks noGrp="1"/>
+          </p:cNvGraphicFramePr>
+          <p:nvPr>
+            <p:extLst>
+              <p:ext uri="{D42A27DB-BD31-4B8C-83A1-F6EECF244321}">
+                <p14:modId xmlns:p14="http://schemas.microsoft.com/office/powerpoint/2010/main" val="654898705"/>
+              </p:ext>
+            </p:extLst>
+          </p:nvPr>
+        </p:nvGraphicFramePr>
+        <p:xfrm>
+          <a:off x="245444" y="647477"/>
+          <a:ext cx="11680257" cy="5734072"/>
+        </p:xfrm>
+        <a:graphic>
+          <a:graphicData uri="http://schemas.openxmlformats.org/drawingml/2006/table">
+            <a:tbl>
+              <a:tblPr firstRow="1" bandRow="1">
+                <a:tableStyleId>{5C22544A-7EE6-4342-B048-85BDC9FD1C3A}</a:tableStyleId>
+              </a:tblPr>
+              <a:tblGrid>
+                <a:gridCol w="548640">
+                  <a:extLst>
+                    <a:ext uri="{9D8B030D-6E8A-4147-A177-3AD203B41FA5}">
+                      <a16:colId xmlns:a16="http://schemas.microsoft.com/office/drawing/2014/main" val="281261951"/>
+                    </a:ext>
+                  </a:extLst>
+                </a:gridCol>
+                <a:gridCol w="6232358">
+                  <a:extLst>
+                    <a:ext uri="{9D8B030D-6E8A-4147-A177-3AD203B41FA5}">
+                      <a16:colId xmlns:a16="http://schemas.microsoft.com/office/drawing/2014/main" val="339801977"/>
+                    </a:ext>
+                  </a:extLst>
+                </a:gridCol>
+                <a:gridCol w="4899259">
+                  <a:extLst>
+                    <a:ext uri="{9D8B030D-6E8A-4147-A177-3AD203B41FA5}">
+                      <a16:colId xmlns:a16="http://schemas.microsoft.com/office/drawing/2014/main" val="2888985733"/>
+                    </a:ext>
+                  </a:extLst>
+                </a:gridCol>
+              </a:tblGrid>
+              <a:tr h="595602">
+                <a:tc>
+                  <a:txBody>
+                    <a:bodyPr/>
+                    <a:lstStyle/>
+                    <a:p>
+                      <a:pPr algn="ctr"/>
+                      <a:r>
+                        <a:rPr lang="ru-RU" dirty="0"/>
+                        <a:t>№</a:t>
+                      </a:r>
+                    </a:p>
+                  </a:txBody>
+                  <a:tcPr/>
+                </a:tc>
+                <a:tc>
+                  <a:txBody>
+                    <a:bodyPr/>
+                    <a:lstStyle/>
+                    <a:p>
+                      <a:pPr algn="ctr"/>
+                      <a:r>
+                        <a:rPr lang="ru-RU" dirty="0"/>
+                        <a:t>Описание критической ошибки</a:t>
+                      </a:r>
+                    </a:p>
+                  </a:txBody>
+                  <a:tcPr/>
+                </a:tc>
+                <a:tc>
+                  <a:txBody>
+                    <a:bodyPr/>
+                    <a:lstStyle/>
+                    <a:p>
+                      <a:pPr algn="ctr"/>
+                      <a:r>
+                        <a:rPr lang="ru-RU" dirty="0"/>
+                        <a:t>Исправление</a:t>
+                      </a:r>
+                    </a:p>
+                  </a:txBody>
+                  <a:tcPr/>
+                </a:tc>
+                <a:extLst>
+                  <a:ext uri="{0D108BD9-81ED-4DB2-BD59-A6C34878D82A}">
+                    <a16:rowId xmlns:a16="http://schemas.microsoft.com/office/drawing/2014/main" val="1488013040"/>
+                  </a:ext>
+                </a:extLst>
+              </a:tr>
+              <a:tr h="1004420">
+                <a:tc>
+                  <a:txBody>
+                    <a:bodyPr/>
+                    <a:lstStyle/>
+                    <a:p>
+                      <a:pPr algn="ctr"/>
+                      <a:r>
+                        <a:rPr lang="ru-RU" sz="1200" dirty="0"/>
+                        <a:t>1</a:t>
+                      </a:r>
+                    </a:p>
+                  </a:txBody>
+                  <a:tcPr/>
+                </a:tc>
+                <a:tc>
+                  <a:txBody>
+                    <a:bodyPr/>
+                    <a:lstStyle/>
+                    <a:p>
+                      <a:pPr algn="ctr"/>
+                      <a:r>
+                        <a:rPr lang="ru-RU" altLang="ru-RU" sz="1200" dirty="0" err="1"/>
+                        <a:t>shared_ptr</a:t>
+                      </a:r>
+                      <a:r>
+                        <a:rPr lang="ru-RU" altLang="ru-RU" sz="1200" dirty="0"/>
+                        <a:t> между </a:t>
+                      </a:r>
+                      <a:r>
+                        <a:rPr lang="ru-RU" altLang="ru-RU" sz="1200" dirty="0" err="1"/>
+                        <a:t>Actor</a:t>
+                      </a:r>
+                      <a:r>
+                        <a:rPr lang="ru-RU" altLang="ru-RU" sz="1200" dirty="0"/>
+                        <a:t> и Movie создаёт цикл, счётчики ссылок никогда не достигают нуля</a:t>
+                      </a:r>
+                    </a:p>
+                    <a:p>
+                      <a:pPr algn="ctr"/>
+                      <a:endParaRPr lang="ru-RU" sz="1200" dirty="0"/>
+                    </a:p>
+                  </a:txBody>
+                  <a:tcPr/>
+                </a:tc>
+                <a:tc>
+                  <a:txBody>
+                    <a:bodyPr/>
+                    <a:lstStyle/>
+                    <a:p>
+                      <a:pPr algn="ctr"/>
+                      <a:r>
+                        <a:rPr lang="ru-RU" sz="1200" dirty="0"/>
+                        <a:t>Необходимо заменить одну из связей на </a:t>
+                      </a:r>
+                      <a:r>
+                        <a:rPr lang="en-US" sz="1200" b="0" i="0" kern="1200" dirty="0">
+                          <a:solidFill>
+                            <a:schemeClr val="dk1"/>
+                          </a:solidFill>
+                          <a:effectLst/>
+                          <a:latin typeface="+mn-lt"/>
+                          <a:ea typeface="+mn-ea"/>
+                          <a:cs typeface="+mn-cs"/>
+                        </a:rPr>
+                        <a:t>std::</a:t>
+                      </a:r>
+                      <a:r>
+                        <a:rPr lang="en-US" sz="1200" b="0" i="0" kern="1200" dirty="0" err="1">
+                          <a:solidFill>
+                            <a:schemeClr val="dk1"/>
+                          </a:solidFill>
+                          <a:effectLst/>
+                          <a:latin typeface="+mn-lt"/>
+                          <a:ea typeface="+mn-ea"/>
+                          <a:cs typeface="+mn-cs"/>
+                        </a:rPr>
+                        <a:t>weak_ptr</a:t>
+                      </a:r>
+                      <a:endParaRPr lang="en-US" sz="1200" b="0" i="0" kern="1200" dirty="0">
+                        <a:solidFill>
+                          <a:schemeClr val="dk1"/>
+                        </a:solidFill>
+                        <a:effectLst/>
+                        <a:latin typeface="+mn-lt"/>
+                        <a:ea typeface="+mn-ea"/>
+                        <a:cs typeface="+mn-cs"/>
+                      </a:endParaRPr>
+                    </a:p>
+                    <a:p>
+                      <a:pPr algn="ctr"/>
+                      <a:endParaRPr lang="en-US" sz="1200" b="0" i="0" kern="1200" dirty="0">
+                        <a:solidFill>
+                          <a:schemeClr val="dk1"/>
+                        </a:solidFill>
+                        <a:effectLst/>
+                        <a:latin typeface="+mn-lt"/>
+                        <a:ea typeface="+mn-ea"/>
+                        <a:cs typeface="+mn-cs"/>
+                      </a:endParaRPr>
+                    </a:p>
+                    <a:p>
+                      <a:pPr algn="ctr"/>
+                      <a:endParaRPr lang="ru-RU" sz="1200" dirty="0"/>
+                    </a:p>
+                  </a:txBody>
+                  <a:tcPr/>
+                </a:tc>
+                <a:extLst>
+                  <a:ext uri="{0D108BD9-81ED-4DB2-BD59-A6C34878D82A}">
+                    <a16:rowId xmlns:a16="http://schemas.microsoft.com/office/drawing/2014/main" val="1287134571"/>
+                  </a:ext>
+                </a:extLst>
+              </a:tr>
+              <a:tr h="2565133">
+                <a:tc>
+                  <a:txBody>
+                    <a:bodyPr/>
+                    <a:lstStyle/>
+                    <a:p>
+                      <a:pPr algn="ctr"/>
+                      <a:r>
+                        <a:rPr lang="ru-RU" sz="1200" dirty="0"/>
+                        <a:t>2</a:t>
+                      </a:r>
+                    </a:p>
+                  </a:txBody>
+                  <a:tcPr/>
+                </a:tc>
+                <a:tc>
+                  <a:txBody>
+                    <a:bodyPr/>
+                    <a:lstStyle/>
+                    <a:p>
+                      <a:pPr marL="0" marR="0" lvl="0" indent="0" algn="ctr" defTabSz="914400" rtl="0" eaLnBrk="1" fontAlgn="auto" latinLnBrk="0" hangingPunct="1">
+                        <a:lnSpc>
+                          <a:spcPct val="100000"/>
+                        </a:lnSpc>
+                        <a:spcBef>
+                          <a:spcPts val="0"/>
+                        </a:spcBef>
+                        <a:spcAft>
+                          <a:spcPts val="0"/>
+                        </a:spcAft>
+                        <a:buClrTx/>
+                        <a:buSzTx/>
+                        <a:buFontTx/>
+                        <a:buNone/>
+                        <a:tabLst/>
+                        <a:defRPr/>
+                      </a:pPr>
+                      <a:r>
+                        <a:rPr lang="ru-RU" sz="1200" dirty="0"/>
+                        <a:t>Метод изменяет вектор, по которому итерируется (параметр </a:t>
+                      </a:r>
+                      <a:r>
+                        <a:rPr lang="ru-RU" sz="1200" dirty="0" err="1"/>
+                        <a:t>genres</a:t>
+                      </a:r>
+                      <a:r>
+                        <a:rPr lang="ru-RU" sz="1200" dirty="0"/>
+                        <a:t>), что приводит к бесконечному циклу и исчерпанию памяти.</a:t>
+                      </a:r>
+                    </a:p>
+                    <a:p>
+                      <a:pPr algn="ctr"/>
+                      <a:endParaRPr lang="en-US" sz="1200" dirty="0"/>
+                    </a:p>
+                    <a:p>
+                      <a:pPr algn="ctr"/>
+                      <a:endParaRPr lang="en-US" sz="1200" dirty="0"/>
+                    </a:p>
+                    <a:p>
+                      <a:pPr algn="ctr"/>
+                      <a:endParaRPr lang="ru-RU" sz="1200" dirty="0"/>
+                    </a:p>
+                  </a:txBody>
+                  <a:tcPr/>
+                </a:tc>
+                <a:tc>
+                  <a:txBody>
+                    <a:bodyPr/>
+                    <a:lstStyle/>
+                    <a:p>
+                      <a:pPr algn="ctr"/>
+                      <a:r>
+                        <a:rPr lang="ru-RU" sz="1200" dirty="0"/>
+                        <a:t>Теперь методы добавляют в член класса, а не параметры</a:t>
+                      </a:r>
+                    </a:p>
+                    <a:p>
+                      <a:pPr algn="ctr"/>
+                      <a:endParaRPr lang="ru-RU" sz="1200" dirty="0"/>
+                    </a:p>
+                    <a:p>
+                      <a:pPr algn="ctr"/>
+                      <a:endParaRPr lang="ru-RU" sz="1200" dirty="0"/>
+                    </a:p>
+                    <a:p>
+                      <a:pPr algn="ctr"/>
+                      <a:endParaRPr lang="ru-RU" sz="1200" dirty="0"/>
+                    </a:p>
+                  </a:txBody>
+                  <a:tcPr/>
+                </a:tc>
+                <a:extLst>
+                  <a:ext uri="{0D108BD9-81ED-4DB2-BD59-A6C34878D82A}">
+                    <a16:rowId xmlns:a16="http://schemas.microsoft.com/office/drawing/2014/main" val="786973174"/>
+                  </a:ext>
+                </a:extLst>
+              </a:tr>
+              <a:tr h="1568917">
+                <a:tc>
+                  <a:txBody>
+                    <a:bodyPr/>
+                    <a:lstStyle/>
+                    <a:p>
+                      <a:pPr algn="ctr"/>
+                      <a:r>
+                        <a:rPr lang="ru-RU" sz="1200" dirty="0"/>
+                        <a:t>3</a:t>
+                      </a:r>
+                    </a:p>
+                  </a:txBody>
+                  <a:tcPr/>
+                </a:tc>
+                <a:tc>
+                  <a:txBody>
+                    <a:bodyPr/>
+                    <a:lstStyle/>
+                    <a:p>
+                      <a:pPr algn="ctr"/>
+                      <a:r>
+                        <a:rPr lang="ru-RU" sz="1100" b="0" i="0" kern="1200" dirty="0">
+                          <a:solidFill>
+                            <a:schemeClr val="dk1"/>
+                          </a:solidFill>
+                          <a:effectLst/>
+                          <a:latin typeface="+mn-lt"/>
+                          <a:ea typeface="+mn-ea"/>
+                          <a:cs typeface="+mn-cs"/>
+                        </a:rPr>
+                        <a:t>Хранение сырых указателей (</a:t>
+                      </a:r>
+                      <a:r>
+                        <a:rPr lang="ru-RU" sz="1100" dirty="0"/>
+                        <a:t>Movie*</a:t>
+                      </a:r>
+                      <a:r>
+                        <a:rPr lang="ru-RU" sz="1100" b="0" i="0" kern="1200" dirty="0">
+                          <a:solidFill>
+                            <a:schemeClr val="dk1"/>
+                          </a:solidFill>
+                          <a:effectLst/>
+                          <a:latin typeface="+mn-lt"/>
+                          <a:ea typeface="+mn-ea"/>
+                          <a:cs typeface="+mn-cs"/>
+                        </a:rPr>
+                        <a:t>) вместо </a:t>
+                      </a:r>
+                      <a:r>
+                        <a:rPr lang="ru-RU" sz="1100" dirty="0" err="1"/>
+                        <a:t>std</a:t>
+                      </a:r>
+                      <a:r>
+                        <a:rPr lang="ru-RU" sz="1100" dirty="0"/>
+                        <a:t>::</a:t>
+                      </a:r>
+                      <a:r>
+                        <a:rPr lang="ru-RU" sz="1100" dirty="0" err="1"/>
+                        <a:t>weak_ptr</a:t>
+                      </a:r>
+                      <a:r>
+                        <a:rPr lang="ru-RU" sz="1100" dirty="0"/>
+                        <a:t>&lt;Movie&gt;</a:t>
+                      </a:r>
+                      <a:r>
+                        <a:rPr lang="ru-RU" sz="1100" b="0" i="0" kern="1200" dirty="0">
+                          <a:solidFill>
+                            <a:schemeClr val="dk1"/>
+                          </a:solidFill>
+                          <a:effectLst/>
+                          <a:latin typeface="+mn-lt"/>
+                          <a:ea typeface="+mn-ea"/>
+                          <a:cs typeface="+mn-cs"/>
+                        </a:rPr>
+                        <a:t> приводит к висячим указателям и неопределенному поведению при доступе к освобожденной памяти.</a:t>
+                      </a:r>
+                      <a:endParaRPr lang="ru-RU" sz="1100" dirty="0"/>
+                    </a:p>
+                  </a:txBody>
+                  <a:tcPr/>
+                </a:tc>
+                <a:tc>
+                  <a:txBody>
+                    <a:bodyPr/>
+                    <a:lstStyle/>
+                    <a:p>
+                      <a:pPr algn="ctr"/>
+                      <a:r>
+                        <a:rPr lang="ru-RU" sz="1100" b="0" i="0" kern="1200" dirty="0">
+                          <a:solidFill>
+                            <a:schemeClr val="dk1"/>
+                          </a:solidFill>
+                          <a:effectLst/>
+                          <a:latin typeface="+mn-lt"/>
+                          <a:ea typeface="+mn-ea"/>
+                          <a:cs typeface="+mn-cs"/>
+                        </a:rPr>
+                        <a:t>Заменили </a:t>
+                      </a:r>
+                      <a:r>
+                        <a:rPr lang="en-US" sz="1100" dirty="0"/>
+                        <a:t>std::vector&lt;Movie*&gt;</a:t>
+                      </a:r>
+                      <a:r>
+                        <a:rPr lang="en-US" sz="1100" b="0" i="0" kern="1200" dirty="0">
+                          <a:solidFill>
+                            <a:schemeClr val="dk1"/>
+                          </a:solidFill>
+                          <a:effectLst/>
+                          <a:latin typeface="+mn-lt"/>
+                          <a:ea typeface="+mn-ea"/>
+                          <a:cs typeface="+mn-cs"/>
+                        </a:rPr>
+                        <a:t> </a:t>
+                      </a:r>
+                      <a:r>
+                        <a:rPr lang="ru-RU" sz="1100" b="0" i="0" kern="1200" dirty="0">
+                          <a:solidFill>
+                            <a:schemeClr val="dk1"/>
+                          </a:solidFill>
+                          <a:effectLst/>
+                          <a:latin typeface="+mn-lt"/>
+                          <a:ea typeface="+mn-ea"/>
+                          <a:cs typeface="+mn-cs"/>
+                        </a:rPr>
+                        <a:t>на </a:t>
+                      </a:r>
+                      <a:r>
+                        <a:rPr lang="en-US" sz="1100" dirty="0"/>
+                        <a:t>std::vector&lt;std::</a:t>
+                      </a:r>
+                      <a:r>
+                        <a:rPr lang="en-US" sz="1100" dirty="0" err="1"/>
+                        <a:t>weak_ptr</a:t>
+                      </a:r>
+                      <a:r>
+                        <a:rPr lang="en-US" sz="1100" dirty="0"/>
+                        <a:t>&lt;Movie&gt;&gt;</a:t>
+                      </a:r>
+                      <a:r>
+                        <a:rPr lang="en-US" sz="1100" b="0" i="0" kern="1200" dirty="0">
+                          <a:solidFill>
+                            <a:schemeClr val="dk1"/>
+                          </a:solidFill>
+                          <a:effectLst/>
+                          <a:latin typeface="+mn-lt"/>
+                          <a:ea typeface="+mn-ea"/>
+                          <a:cs typeface="+mn-cs"/>
+                        </a:rPr>
+                        <a:t> </a:t>
+                      </a:r>
+                      <a:r>
+                        <a:rPr lang="ru-RU" sz="1100" b="0" i="0" kern="1200" dirty="0">
+                          <a:solidFill>
+                            <a:schemeClr val="dk1"/>
+                          </a:solidFill>
+                          <a:effectLst/>
+                          <a:latin typeface="+mn-lt"/>
+                          <a:ea typeface="+mn-ea"/>
+                          <a:cs typeface="+mn-cs"/>
+                        </a:rPr>
+                        <a:t>для безопасного хранения </a:t>
+                      </a:r>
+                      <a:r>
+                        <a:rPr lang="ru-RU" sz="1100" b="0" i="0" kern="1200" dirty="0" err="1">
+                          <a:solidFill>
+                            <a:schemeClr val="dk1"/>
+                          </a:solidFill>
+                          <a:effectLst/>
+                          <a:latin typeface="+mn-lt"/>
+                          <a:ea typeface="+mn-ea"/>
+                          <a:cs typeface="+mn-cs"/>
+                        </a:rPr>
+                        <a:t>невладеющих</a:t>
+                      </a:r>
+                      <a:r>
+                        <a:rPr lang="ru-RU" sz="1100" b="0" i="0" kern="1200" dirty="0">
+                          <a:solidFill>
+                            <a:schemeClr val="dk1"/>
+                          </a:solidFill>
+                          <a:effectLst/>
+                          <a:latin typeface="+mn-lt"/>
+                          <a:ea typeface="+mn-ea"/>
+                          <a:cs typeface="+mn-cs"/>
+                        </a:rPr>
+                        <a:t> ссылок.</a:t>
+                      </a:r>
+                      <a:endParaRPr lang="ru-RU" sz="1100" dirty="0"/>
+                    </a:p>
+                  </a:txBody>
+                  <a:tcPr/>
+                </a:tc>
+                <a:extLst>
+                  <a:ext uri="{0D108BD9-81ED-4DB2-BD59-A6C34878D82A}">
+                    <a16:rowId xmlns:a16="http://schemas.microsoft.com/office/drawing/2014/main" val="2956741039"/>
+                  </a:ext>
+                </a:extLst>
+              </a:tr>
+            </a:tbl>
+          </a:graphicData>
+        </a:graphic>
+      </p:graphicFrame>
+      <p:pic>
+        <p:nvPicPr>
+          <p:cNvPr id="6" name="Рисунок 5">
+            <a:extLst>
+              <a:ext uri="{FF2B5EF4-FFF2-40B4-BE49-F238E27FC236}">
+                <a16:creationId xmlns:a16="http://schemas.microsoft.com/office/drawing/2014/main" id="{0895AD34-C267-4026-AC52-88B8EC8259CF}"/>
+              </a:ext>
+            </a:extLst>
+          </p:cNvPr>
+          <p:cNvPicPr>
+            <a:picLocks noChangeAspect="1"/>
+          </p:cNvPicPr>
+          <p:nvPr/>
+        </p:nvPicPr>
+        <p:blipFill>
+          <a:blip r:embed="rId2"/>
+          <a:stretch>
+            <a:fillRect/>
+          </a:stretch>
+        </p:blipFill>
+        <p:spPr>
+          <a:xfrm>
+            <a:off x="2187683" y="1524298"/>
+            <a:ext cx="2938780" cy="615270"/>
+          </a:xfrm>
+          <a:prstGeom prst="rect">
+            <a:avLst/>
+          </a:prstGeom>
+        </p:spPr>
+      </p:pic>
+      <p:pic>
+        <p:nvPicPr>
+          <p:cNvPr id="8" name="Рисунок 7">
+            <a:extLst>
+              <a:ext uri="{FF2B5EF4-FFF2-40B4-BE49-F238E27FC236}">
+                <a16:creationId xmlns:a16="http://schemas.microsoft.com/office/drawing/2014/main" id="{0D00AF76-6A27-1D19-04C5-12E1B92D3619}"/>
+              </a:ext>
+            </a:extLst>
+          </p:cNvPr>
+          <p:cNvPicPr>
+            <a:picLocks noChangeAspect="1"/>
+          </p:cNvPicPr>
+          <p:nvPr/>
+        </p:nvPicPr>
+        <p:blipFill>
+          <a:blip r:embed="rId3"/>
+          <a:stretch>
+            <a:fillRect/>
+          </a:stretch>
+        </p:blipFill>
+        <p:spPr>
+          <a:xfrm>
+            <a:off x="7464391" y="1562799"/>
+            <a:ext cx="2734376" cy="634375"/>
+          </a:xfrm>
+          <a:prstGeom prst="rect">
+            <a:avLst/>
+          </a:prstGeom>
+        </p:spPr>
+      </p:pic>
+      <p:pic>
+        <p:nvPicPr>
+          <p:cNvPr id="10" name="Рисунок 9">
+            <a:extLst>
+              <a:ext uri="{FF2B5EF4-FFF2-40B4-BE49-F238E27FC236}">
+                <a16:creationId xmlns:a16="http://schemas.microsoft.com/office/drawing/2014/main" id="{33F1B1E5-93F1-F587-5E25-DD5A5F735241}"/>
+              </a:ext>
+            </a:extLst>
+          </p:cNvPr>
+          <p:cNvPicPr>
+            <a:picLocks noChangeAspect="1"/>
+          </p:cNvPicPr>
+          <p:nvPr/>
+        </p:nvPicPr>
+        <p:blipFill>
+          <a:blip r:embed="rId4"/>
+          <a:stretch>
+            <a:fillRect/>
+          </a:stretch>
+        </p:blipFill>
+        <p:spPr>
+          <a:xfrm>
+            <a:off x="2877952" y="2763293"/>
+            <a:ext cx="2147777" cy="1955140"/>
+          </a:xfrm>
+          <a:prstGeom prst="rect">
+            <a:avLst/>
+          </a:prstGeom>
+        </p:spPr>
+      </p:pic>
+      <p:pic>
+        <p:nvPicPr>
+          <p:cNvPr id="12" name="Рисунок 11">
+            <a:extLst>
+              <a:ext uri="{FF2B5EF4-FFF2-40B4-BE49-F238E27FC236}">
+                <a16:creationId xmlns:a16="http://schemas.microsoft.com/office/drawing/2014/main" id="{1370053C-2299-2285-A54F-CE117F8D0E61}"/>
+              </a:ext>
+            </a:extLst>
+          </p:cNvPr>
+          <p:cNvPicPr>
+            <a:picLocks noChangeAspect="1"/>
+          </p:cNvPicPr>
+          <p:nvPr/>
+        </p:nvPicPr>
+        <p:blipFill>
+          <a:blip r:embed="rId5"/>
+          <a:stretch>
+            <a:fillRect/>
+          </a:stretch>
+        </p:blipFill>
+        <p:spPr>
+          <a:xfrm>
+            <a:off x="8330666" y="2502936"/>
+            <a:ext cx="2301668" cy="2263267"/>
+          </a:xfrm>
+          <a:prstGeom prst="rect">
+            <a:avLst/>
+          </a:prstGeom>
+        </p:spPr>
+      </p:pic>
+      <p:pic>
+        <p:nvPicPr>
+          <p:cNvPr id="14" name="Рисунок 13">
+            <a:extLst>
+              <a:ext uri="{FF2B5EF4-FFF2-40B4-BE49-F238E27FC236}">
+                <a16:creationId xmlns:a16="http://schemas.microsoft.com/office/drawing/2014/main" id="{9F50B41C-E626-D3F4-2C53-3AB5B36B2B8F}"/>
+              </a:ext>
+            </a:extLst>
+          </p:cNvPr>
+          <p:cNvPicPr>
+            <a:picLocks noChangeAspect="1"/>
+          </p:cNvPicPr>
+          <p:nvPr/>
+        </p:nvPicPr>
+        <p:blipFill>
+          <a:blip r:embed="rId6"/>
+          <a:stretch>
+            <a:fillRect/>
+          </a:stretch>
+        </p:blipFill>
+        <p:spPr>
+          <a:xfrm>
+            <a:off x="2319688" y="5254035"/>
+            <a:ext cx="3454855" cy="956488"/>
+          </a:xfrm>
+          <a:prstGeom prst="rect">
+            <a:avLst/>
+          </a:prstGeom>
+        </p:spPr>
+      </p:pic>
+      <p:pic>
+        <p:nvPicPr>
+          <p:cNvPr id="16" name="Рисунок 15">
+            <a:extLst>
+              <a:ext uri="{FF2B5EF4-FFF2-40B4-BE49-F238E27FC236}">
+                <a16:creationId xmlns:a16="http://schemas.microsoft.com/office/drawing/2014/main" id="{C939C87F-F037-1EB6-9BA8-A5434DB6EAAB}"/>
+              </a:ext>
+            </a:extLst>
+          </p:cNvPr>
+          <p:cNvPicPr>
+            <a:picLocks noChangeAspect="1"/>
+          </p:cNvPicPr>
+          <p:nvPr/>
+        </p:nvPicPr>
+        <p:blipFill>
+          <a:blip r:embed="rId7"/>
+          <a:stretch>
+            <a:fillRect/>
+          </a:stretch>
+        </p:blipFill>
+        <p:spPr>
+          <a:xfrm>
+            <a:off x="8046523" y="5291965"/>
+            <a:ext cx="3387281" cy="977981"/>
+          </a:xfrm>
+          <a:prstGeom prst="rect">
+            <a:avLst/>
+          </a:prstGeom>
+        </p:spPr>
+      </p:pic>
+    </p:spTree>
+    <p:extLst>
+      <p:ext uri="{BB962C8B-B14F-4D97-AF65-F5344CB8AC3E}">
+        <p14:creationId xmlns:p14="http://schemas.microsoft.com/office/powerpoint/2010/main" val="935711914"/>
+      </p:ext>
+    </p:extLst>
+  </p:cSld>
+  <p:clrMapOvr>
+    <a:masterClrMapping/>
+  </p:clrMapOvr>
+</p:sld>
+</file>
+
+<file path=ppt/slides/slide18.xml><?xml version="1.0" encoding="utf-8"?>
+<p:sld xmlns:a="http://schemas.openxmlformats.org/drawingml/2006/main" xmlns:r="http://schemas.openxmlformats.org/officeDocument/2006/relationships" xmlns:p="http://schemas.openxmlformats.org/presentationml/2006/main">
+  <p:cSld>
+    <p:spTree>
+      <p:nvGrpSpPr>
+        <p:cNvPr id="1" name=""/>
+        <p:cNvGrpSpPr/>
+        <p:nvPr/>
+      </p:nvGrpSpPr>
+      <p:grpSpPr>
+        <a:xfrm>
+          <a:off x="0" y="0"/>
+          <a:ext cx="0" cy="0"/>
+          <a:chOff x="0" y="0"/>
+          <a:chExt cx="0" cy="0"/>
+        </a:xfrm>
+      </p:grpSpPr>
+      <p:sp>
+        <p:nvSpPr>
+          <p:cNvPr id="2" name="Заголовок 1">
+            <a:extLst>
+              <a:ext uri="{FF2B5EF4-FFF2-40B4-BE49-F238E27FC236}">
+                <a16:creationId xmlns:a16="http://schemas.microsoft.com/office/drawing/2014/main" id="{D356170E-AAEB-47D8-D7D2-D5D2C5DEDE1F}"/>
+              </a:ext>
+            </a:extLst>
+          </p:cNvPr>
+          <p:cNvSpPr>
+            <a:spLocks noGrp="1"/>
+          </p:cNvSpPr>
+          <p:nvPr>
+            <p:ph type="title"/>
+          </p:nvPr>
+        </p:nvSpPr>
+        <p:spPr>
+          <a:xfrm>
+            <a:off x="0" y="0"/>
+            <a:ext cx="12192000" cy="607027"/>
+          </a:xfrm>
+        </p:spPr>
+        <p:txBody>
+          <a:bodyPr>
+            <a:normAutofit fontScale="90000"/>
+          </a:bodyPr>
+          <a:lstStyle/>
+          <a:p>
+            <a:r>
+              <a:rPr lang="ru-RU" dirty="0"/>
+              <a:t>Таблица критических ошибок</a:t>
+            </a:r>
+          </a:p>
+        </p:txBody>
+      </p:sp>
+      <p:sp>
+        <p:nvSpPr>
+          <p:cNvPr id="3" name="Номер слайда 2">
+            <a:extLst>
+              <a:ext uri="{FF2B5EF4-FFF2-40B4-BE49-F238E27FC236}">
+                <a16:creationId xmlns:a16="http://schemas.microsoft.com/office/drawing/2014/main" id="{5D367B5A-6021-E1CE-85C1-D73934661E14}"/>
+              </a:ext>
+            </a:extLst>
+          </p:cNvPr>
+          <p:cNvSpPr>
+            <a:spLocks noGrp="1"/>
+          </p:cNvSpPr>
+          <p:nvPr>
+            <p:ph type="sldNum" sz="quarter" idx="12"/>
+          </p:nvPr>
+        </p:nvSpPr>
+        <p:spPr/>
+        <p:txBody>
+          <a:bodyPr/>
+          <a:lstStyle/>
+          <a:p>
+            <a:pPr algn="ctr"/>
+            <a:fld id="{68327A13-2E2F-4F2E-8A82-1D293133525B}" type="slidenum">
+              <a:rPr lang="ru-RU" smtClean="0"/>
+              <a:pPr algn="ctr"/>
+              <a:t>18</a:t>
+            </a:fld>
+            <a:endParaRPr lang="ru-RU"/>
+          </a:p>
+        </p:txBody>
+      </p:sp>
+      <p:graphicFrame>
+        <p:nvGraphicFramePr>
+          <p:cNvPr id="4" name="Таблица 4">
+            <a:extLst>
+              <a:ext uri="{FF2B5EF4-FFF2-40B4-BE49-F238E27FC236}">
+                <a16:creationId xmlns:a16="http://schemas.microsoft.com/office/drawing/2014/main" id="{F08C1867-3DD9-177B-D2D4-18E3687EF54A}"/>
+              </a:ext>
+            </a:extLst>
+          </p:cNvPr>
+          <p:cNvGraphicFramePr>
+            <a:graphicFrameLocks noGrp="1"/>
+          </p:cNvGraphicFramePr>
+          <p:nvPr>
+            <p:extLst>
+              <p:ext uri="{D42A27DB-BD31-4B8C-83A1-F6EECF244321}">
+                <p14:modId xmlns:p14="http://schemas.microsoft.com/office/powerpoint/2010/main" val="2440214309"/>
+              </p:ext>
+            </p:extLst>
+          </p:nvPr>
+        </p:nvGraphicFramePr>
+        <p:xfrm>
+          <a:off x="206943" y="556038"/>
+          <a:ext cx="11680257" cy="6165438"/>
+        </p:xfrm>
+        <a:graphic>
+          <a:graphicData uri="http://schemas.openxmlformats.org/drawingml/2006/table">
+            <a:tbl>
+              <a:tblPr firstRow="1" bandRow="1">
+                <a:tableStyleId>{5C22544A-7EE6-4342-B048-85BDC9FD1C3A}</a:tableStyleId>
+              </a:tblPr>
+              <a:tblGrid>
+                <a:gridCol w="548640">
+                  <a:extLst>
+                    <a:ext uri="{9D8B030D-6E8A-4147-A177-3AD203B41FA5}">
+                      <a16:colId xmlns:a16="http://schemas.microsoft.com/office/drawing/2014/main" val="281261951"/>
+                    </a:ext>
+                  </a:extLst>
+                </a:gridCol>
+                <a:gridCol w="6232358">
+                  <a:extLst>
+                    <a:ext uri="{9D8B030D-6E8A-4147-A177-3AD203B41FA5}">
+                      <a16:colId xmlns:a16="http://schemas.microsoft.com/office/drawing/2014/main" val="339801977"/>
+                    </a:ext>
+                  </a:extLst>
+                </a:gridCol>
+                <a:gridCol w="4899259">
+                  <a:extLst>
+                    <a:ext uri="{9D8B030D-6E8A-4147-A177-3AD203B41FA5}">
+                      <a16:colId xmlns:a16="http://schemas.microsoft.com/office/drawing/2014/main" val="2888985733"/>
+                    </a:ext>
+                  </a:extLst>
+                </a:gridCol>
+              </a:tblGrid>
+              <a:tr h="507848">
+                <a:tc>
+                  <a:txBody>
+                    <a:bodyPr/>
+                    <a:lstStyle/>
+                    <a:p>
+                      <a:pPr algn="ctr"/>
+                      <a:r>
+                        <a:rPr lang="ru-RU" dirty="0"/>
+                        <a:t>№</a:t>
+                      </a:r>
+                    </a:p>
+                  </a:txBody>
+                  <a:tcPr/>
+                </a:tc>
+                <a:tc>
+                  <a:txBody>
+                    <a:bodyPr/>
+                    <a:lstStyle/>
+                    <a:p>
+                      <a:pPr algn="ctr"/>
+                      <a:r>
+                        <a:rPr lang="ru-RU" dirty="0"/>
+                        <a:t>Описание критической ошибки</a:t>
+                      </a:r>
+                    </a:p>
+                  </a:txBody>
+                  <a:tcPr/>
+                </a:tc>
+                <a:tc>
+                  <a:txBody>
+                    <a:bodyPr/>
+                    <a:lstStyle/>
+                    <a:p>
+                      <a:pPr algn="ctr"/>
+                      <a:r>
+                        <a:rPr lang="ru-RU" dirty="0"/>
+                        <a:t>Исправление</a:t>
+                      </a:r>
+                    </a:p>
+                  </a:txBody>
+                  <a:tcPr/>
+                </a:tc>
+                <a:extLst>
+                  <a:ext uri="{0D108BD9-81ED-4DB2-BD59-A6C34878D82A}">
+                    <a16:rowId xmlns:a16="http://schemas.microsoft.com/office/drawing/2014/main" val="1488013040"/>
+                  </a:ext>
+                </a:extLst>
+              </a:tr>
+              <a:tr h="885157">
+                <a:tc>
+                  <a:txBody>
+                    <a:bodyPr/>
+                    <a:lstStyle/>
+                    <a:p>
+                      <a:pPr algn="ctr"/>
+                      <a:r>
+                        <a:rPr lang="ru-RU" sz="1200" dirty="0"/>
+                        <a:t>4</a:t>
+                      </a:r>
+                    </a:p>
+                  </a:txBody>
+                  <a:tcPr/>
+                </a:tc>
+                <a:tc>
+                  <a:txBody>
+                    <a:bodyPr/>
+                    <a:lstStyle/>
+                    <a:p>
+                      <a:pPr algn="ctr"/>
+                      <a:r>
+                        <a:rPr lang="ru-RU" sz="1100" b="0" i="0" kern="1200" dirty="0">
+                          <a:solidFill>
+                            <a:schemeClr val="dk1"/>
+                          </a:solidFill>
+                          <a:effectLst/>
+                          <a:latin typeface="+mn-lt"/>
+                          <a:ea typeface="+mn-ea"/>
+                          <a:cs typeface="+mn-cs"/>
+                        </a:rPr>
+                        <a:t>Теневая переменная </a:t>
+                      </a:r>
+                      <a:r>
+                        <a:rPr lang="ru-RU" sz="1100" dirty="0" err="1"/>
+                        <a:t>order</a:t>
+                      </a:r>
+                      <a:r>
+                        <a:rPr lang="ru-RU" sz="1100" b="0" i="0" kern="1200" dirty="0">
+                          <a:solidFill>
+                            <a:schemeClr val="dk1"/>
+                          </a:solidFill>
+                          <a:effectLst/>
+                          <a:latin typeface="+mn-lt"/>
+                          <a:ea typeface="+mn-ea"/>
+                          <a:cs typeface="+mn-cs"/>
+                        </a:rPr>
+                        <a:t> в методе </a:t>
+                      </a:r>
+                      <a:r>
+                        <a:rPr lang="ru-RU" sz="1100" dirty="0" err="1"/>
+                        <a:t>add_oder</a:t>
+                      </a:r>
+                      <a:r>
+                        <a:rPr lang="ru-RU" sz="1100" b="0" i="0" kern="1200" dirty="0">
+                          <a:solidFill>
+                            <a:schemeClr val="dk1"/>
+                          </a:solidFill>
+                          <a:effectLst/>
+                          <a:latin typeface="+mn-lt"/>
+                          <a:ea typeface="+mn-ea"/>
+                          <a:cs typeface="+mn-cs"/>
+                        </a:rPr>
+                        <a:t> оставляет член класса неинициализированным, что приводит к разыменованию нулевого указателя в </a:t>
+                      </a:r>
+                      <a:r>
+                        <a:rPr lang="ru-RU" sz="1100" dirty="0" err="1"/>
+                        <a:t>to_string</a:t>
+                      </a:r>
+                      <a:r>
+                        <a:rPr lang="ru-RU" sz="1100" b="0" i="0" kern="1200" dirty="0">
+                          <a:solidFill>
+                            <a:schemeClr val="dk1"/>
+                          </a:solidFill>
+                          <a:effectLst/>
+                          <a:latin typeface="+mn-lt"/>
+                          <a:ea typeface="+mn-ea"/>
+                          <a:cs typeface="+mn-cs"/>
+                        </a:rPr>
+                        <a:t>.</a:t>
+                      </a:r>
+                      <a:endParaRPr lang="ru-RU" sz="1100" dirty="0"/>
+                    </a:p>
+                  </a:txBody>
+                  <a:tcPr/>
+                </a:tc>
+                <a:tc>
+                  <a:txBody>
+                    <a:bodyPr/>
+                    <a:lstStyle/>
+                    <a:p>
+                      <a:pPr algn="ctr"/>
+                      <a:r>
+                        <a:rPr lang="ru-RU" sz="1100" b="0" i="0" kern="1200" dirty="0" err="1">
+                          <a:solidFill>
+                            <a:schemeClr val="dk1"/>
+                          </a:solidFill>
+                          <a:effectLst/>
+                          <a:latin typeface="+mn-lt"/>
+                          <a:ea typeface="+mn-ea"/>
+                          <a:cs typeface="+mn-cs"/>
+                        </a:rPr>
+                        <a:t>Убераем</a:t>
+                      </a:r>
+                      <a:r>
+                        <a:rPr lang="ru-RU" sz="1100" b="0" i="0" kern="1200" dirty="0">
+                          <a:solidFill>
+                            <a:schemeClr val="dk1"/>
+                          </a:solidFill>
+                          <a:effectLst/>
+                          <a:latin typeface="+mn-lt"/>
+                          <a:ea typeface="+mn-ea"/>
+                          <a:cs typeface="+mn-cs"/>
+                        </a:rPr>
+                        <a:t> создания новых </a:t>
+                      </a:r>
+                      <a:r>
+                        <a:rPr lang="ru-RU" sz="1100" dirty="0" err="1"/>
+                        <a:t>shared_ptr</a:t>
+                      </a:r>
+                      <a:r>
+                        <a:rPr lang="ru-RU" sz="1100" b="0" i="0" kern="1200" dirty="0">
+                          <a:solidFill>
+                            <a:schemeClr val="dk1"/>
+                          </a:solidFill>
+                          <a:effectLst/>
+                          <a:latin typeface="+mn-lt"/>
+                          <a:ea typeface="+mn-ea"/>
+                          <a:cs typeface="+mn-cs"/>
+                        </a:rPr>
+                        <a:t> из сырых указателей</a:t>
+                      </a:r>
+                      <a:endParaRPr lang="en-US" sz="1100" b="0" i="0" kern="1200" dirty="0">
+                        <a:solidFill>
+                          <a:schemeClr val="dk1"/>
+                        </a:solidFill>
+                        <a:effectLst/>
+                        <a:latin typeface="+mn-lt"/>
+                        <a:ea typeface="+mn-ea"/>
+                        <a:cs typeface="+mn-cs"/>
+                      </a:endParaRPr>
+                    </a:p>
+                    <a:p>
+                      <a:pPr algn="ctr"/>
+                      <a:endParaRPr lang="en-US" sz="1200" b="0" i="0" kern="1200" dirty="0">
+                        <a:solidFill>
+                          <a:schemeClr val="dk1"/>
+                        </a:solidFill>
+                        <a:effectLst/>
+                        <a:latin typeface="+mn-lt"/>
+                        <a:ea typeface="+mn-ea"/>
+                        <a:cs typeface="+mn-cs"/>
+                      </a:endParaRPr>
+                    </a:p>
+                    <a:p>
+                      <a:pPr algn="ctr"/>
+                      <a:endParaRPr lang="ru-RU" sz="1200" dirty="0"/>
+                    </a:p>
+                  </a:txBody>
+                  <a:tcPr/>
+                </a:tc>
+                <a:extLst>
+                  <a:ext uri="{0D108BD9-81ED-4DB2-BD59-A6C34878D82A}">
+                    <a16:rowId xmlns:a16="http://schemas.microsoft.com/office/drawing/2014/main" val="1287134571"/>
+                  </a:ext>
+                </a:extLst>
+              </a:tr>
+              <a:tr h="2096917">
+                <a:tc>
+                  <a:txBody>
+                    <a:bodyPr/>
+                    <a:lstStyle/>
+                    <a:p>
+                      <a:pPr algn="ctr"/>
+                      <a:r>
+                        <a:rPr lang="ru-RU" sz="1200" dirty="0"/>
+                        <a:t>5</a:t>
+                      </a:r>
+                    </a:p>
+                  </a:txBody>
+                  <a:tcPr/>
+                </a:tc>
+                <a:tc>
+                  <a:txBody>
+                    <a:bodyPr/>
+                    <a:lstStyle/>
+                    <a:p>
+                      <a:pPr marL="0" marR="0" lvl="0" indent="0" algn="ctr" defTabSz="914400" rtl="0" eaLnBrk="1" fontAlgn="auto" latinLnBrk="0" hangingPunct="1">
+                        <a:lnSpc>
+                          <a:spcPct val="100000"/>
+                        </a:lnSpc>
+                        <a:spcBef>
+                          <a:spcPts val="0"/>
+                        </a:spcBef>
+                        <a:spcAft>
+                          <a:spcPts val="0"/>
+                        </a:spcAft>
+                        <a:buClrTx/>
+                        <a:buSzTx/>
+                        <a:buFontTx/>
+                        <a:buNone/>
+                        <a:tabLst/>
+                        <a:defRPr/>
+                      </a:pPr>
+                      <a:r>
+                        <a:rPr lang="ru-RU" sz="1100" b="0" i="0" kern="1200" dirty="0">
+                          <a:solidFill>
+                            <a:schemeClr val="dk1"/>
+                          </a:solidFill>
+                          <a:effectLst/>
+                          <a:latin typeface="+mn-lt"/>
+                          <a:ea typeface="+mn-ea"/>
+                          <a:cs typeface="+mn-cs"/>
+                        </a:rPr>
+                        <a:t>Метод </a:t>
+                      </a:r>
+                      <a:r>
+                        <a:rPr lang="ru-RU" sz="1100" dirty="0" err="1"/>
+                        <a:t>get_top_sale_movie</a:t>
+                      </a:r>
+                      <a:r>
+                        <a:rPr lang="ru-RU" sz="1100" b="0" i="0" kern="1200" dirty="0">
+                          <a:solidFill>
+                            <a:schemeClr val="dk1"/>
+                          </a:solidFill>
+                          <a:effectLst/>
+                          <a:latin typeface="+mn-lt"/>
+                          <a:ea typeface="+mn-ea"/>
+                          <a:cs typeface="+mn-cs"/>
+                        </a:rPr>
+                        <a:t> разыменовывает нулевой указатель, если хранилище фильмов пусто или все продажи отрицательны, что приводит к краху приложения.</a:t>
+                      </a:r>
+                      <a:endParaRPr lang="ru-RU" sz="1100" dirty="0"/>
+                    </a:p>
+                  </a:txBody>
+                  <a:tcPr/>
+                </a:tc>
+                <a:tc>
+                  <a:txBody>
+                    <a:bodyPr/>
+                    <a:lstStyle/>
+                    <a:p>
+                      <a:pPr algn="ctr"/>
+                      <a:r>
+                        <a:rPr lang="ru-RU" sz="1200" dirty="0"/>
+                        <a:t>Теперь методы добавляют в член класса, а не параметры</a:t>
+                      </a:r>
+                    </a:p>
+                    <a:p>
+                      <a:pPr algn="ctr"/>
+                      <a:endParaRPr lang="ru-RU" sz="1200" dirty="0"/>
+                    </a:p>
+                    <a:p>
+                      <a:pPr algn="ctr"/>
+                      <a:endParaRPr lang="ru-RU" sz="1200" dirty="0"/>
+                    </a:p>
+                    <a:p>
+                      <a:pPr algn="ctr"/>
+                      <a:endParaRPr lang="ru-RU" sz="1200" dirty="0"/>
+                    </a:p>
+                  </a:txBody>
+                  <a:tcPr/>
+                </a:tc>
+                <a:extLst>
+                  <a:ext uri="{0D108BD9-81ED-4DB2-BD59-A6C34878D82A}">
+                    <a16:rowId xmlns:a16="http://schemas.microsoft.com/office/drawing/2014/main" val="786973174"/>
+                  </a:ext>
+                </a:extLst>
+              </a:tr>
+              <a:tr h="1337758">
+                <a:tc>
+                  <a:txBody>
+                    <a:bodyPr/>
+                    <a:lstStyle/>
+                    <a:p>
+                      <a:pPr algn="ctr"/>
+                      <a:r>
+                        <a:rPr lang="ru-RU" sz="1200" dirty="0"/>
+                        <a:t>6</a:t>
+                      </a:r>
+                    </a:p>
+                  </a:txBody>
+                  <a:tcPr/>
+                </a:tc>
+                <a:tc>
+                  <a:txBody>
+                    <a:bodyPr/>
+                    <a:lstStyle/>
+                    <a:p>
+                      <a:pPr algn="ctr"/>
+                      <a:r>
+                        <a:rPr lang="ru-RU" sz="1100" dirty="0"/>
+                        <a:t>Циклическая зависимость из-за ненужного включения заголовочного файла. Файл включает </a:t>
+                      </a:r>
+                      <a:r>
+                        <a:rPr lang="ru-RU" sz="1100" dirty="0" err="1"/>
+                        <a:t>Movie.h</a:t>
+                      </a:r>
+                      <a:r>
+                        <a:rPr lang="ru-RU" sz="1100" dirty="0"/>
+                        <a:t>, но использует только </a:t>
+                      </a:r>
+                      <a:r>
+                        <a:rPr lang="ru-RU" sz="1100" dirty="0" err="1"/>
+                        <a:t>std</a:t>
+                      </a:r>
+                      <a:r>
+                        <a:rPr lang="ru-RU" sz="1100" dirty="0"/>
+                        <a:t>::</a:t>
+                      </a:r>
+                      <a:r>
+                        <a:rPr lang="ru-RU" sz="1100" dirty="0" err="1"/>
+                        <a:t>shared_ptr</a:t>
+                      </a:r>
+                      <a:r>
+                        <a:rPr lang="ru-RU" sz="1100" dirty="0"/>
+                        <a:t>&lt;Movie&gt;, что требует лишь предварительного объявления. </a:t>
+                      </a:r>
+                    </a:p>
+                  </a:txBody>
+                  <a:tcPr/>
+                </a:tc>
+                <a:tc>
+                  <a:txBody>
+                    <a:bodyPr/>
+                    <a:lstStyle/>
+                    <a:p>
+                      <a:pPr algn="ctr"/>
+                      <a:r>
+                        <a:rPr lang="ru-RU" sz="1100" b="0" i="0" kern="1200" dirty="0">
+                          <a:solidFill>
+                            <a:schemeClr val="dk1"/>
+                          </a:solidFill>
+                          <a:effectLst/>
+                          <a:latin typeface="+mn-lt"/>
+                          <a:ea typeface="+mn-ea"/>
+                          <a:cs typeface="+mn-cs"/>
+                        </a:rPr>
+                        <a:t>Убрали зависимость, оставили только указание что он существует.</a:t>
+                      </a:r>
+                      <a:endParaRPr lang="ru-RU" sz="1100" dirty="0"/>
+                    </a:p>
+                  </a:txBody>
+                  <a:tcPr/>
+                </a:tc>
+                <a:extLst>
+                  <a:ext uri="{0D108BD9-81ED-4DB2-BD59-A6C34878D82A}">
+                    <a16:rowId xmlns:a16="http://schemas.microsoft.com/office/drawing/2014/main" val="2956741039"/>
+                  </a:ext>
+                </a:extLst>
+              </a:tr>
+              <a:tr h="1337758">
+                <a:tc>
+                  <a:txBody>
+                    <a:bodyPr/>
+                    <a:lstStyle/>
+                    <a:p>
+                      <a:pPr algn="ctr"/>
+                      <a:endParaRPr lang="ru-RU" sz="1200" dirty="0"/>
+                    </a:p>
+                  </a:txBody>
+                  <a:tcPr/>
+                </a:tc>
+                <a:tc>
+                  <a:txBody>
+                    <a:bodyPr/>
+                    <a:lstStyle/>
+                    <a:p>
+                      <a:pPr algn="ctr"/>
+                      <a:r>
+                        <a:rPr lang="ru-RU" sz="1100" b="0" i="0" kern="1200" dirty="0">
+                          <a:solidFill>
+                            <a:schemeClr val="dk1"/>
+                          </a:solidFill>
+                          <a:effectLst/>
+                          <a:latin typeface="+mn-lt"/>
+                          <a:ea typeface="+mn-ea"/>
+                          <a:cs typeface="+mn-cs"/>
+                        </a:rPr>
+                        <a:t>Проблема заключается в </a:t>
+                      </a:r>
+                      <a:r>
+                        <a:rPr lang="ru-RU" sz="1100" b="1" i="0" kern="1200" dirty="0">
+                          <a:solidFill>
+                            <a:schemeClr val="dk1"/>
+                          </a:solidFill>
+                          <a:effectLst/>
+                          <a:latin typeface="+mn-lt"/>
+                          <a:ea typeface="+mn-ea"/>
+                          <a:cs typeface="+mn-cs"/>
+                        </a:rPr>
+                        <a:t>несоответствии подписей (сигнатур) функции</a:t>
+                      </a:r>
+                      <a:r>
+                        <a:rPr lang="ru-RU" sz="1100" b="0" i="0" kern="1200" dirty="0">
+                          <a:solidFill>
+                            <a:schemeClr val="dk1"/>
+                          </a:solidFill>
+                          <a:effectLst/>
+                          <a:latin typeface="+mn-lt"/>
+                          <a:ea typeface="+mn-ea"/>
+                          <a:cs typeface="+mn-cs"/>
+                        </a:rPr>
+                        <a:t> между заголовочным файлом (</a:t>
+                      </a:r>
+                      <a:r>
+                        <a:rPr lang="ru-RU" sz="1100" dirty="0"/>
+                        <a:t>.h</a:t>
+                      </a:r>
+                      <a:r>
+                        <a:rPr lang="ru-RU" sz="1100" b="0" i="0" kern="1200" dirty="0">
+                          <a:solidFill>
+                            <a:schemeClr val="dk1"/>
+                          </a:solidFill>
+                          <a:effectLst/>
+                          <a:latin typeface="+mn-lt"/>
+                          <a:ea typeface="+mn-ea"/>
+                          <a:cs typeface="+mn-cs"/>
+                        </a:rPr>
+                        <a:t>) и файлом реализации (</a:t>
+                      </a:r>
+                      <a:r>
+                        <a:rPr lang="ru-RU" sz="1100" dirty="0"/>
+                        <a:t>.</a:t>
+                      </a:r>
+                      <a:r>
+                        <a:rPr lang="ru-RU" sz="1100" dirty="0" err="1"/>
+                        <a:t>cpp</a:t>
+                      </a:r>
+                      <a:r>
+                        <a:rPr lang="ru-RU" sz="1100" b="0" i="0" kern="1200" dirty="0">
+                          <a:solidFill>
+                            <a:schemeClr val="dk1"/>
+                          </a:solidFill>
+                          <a:effectLst/>
+                          <a:latin typeface="+mn-lt"/>
+                          <a:ea typeface="+mn-ea"/>
+                          <a:cs typeface="+mn-cs"/>
+                        </a:rPr>
+                        <a:t>).</a:t>
+                      </a:r>
+                    </a:p>
+                    <a:p>
+                      <a:pPr algn="ctr"/>
+                      <a:endParaRPr lang="ru-RU" sz="1100" dirty="0"/>
+                    </a:p>
+                  </a:txBody>
+                  <a:tcPr/>
+                </a:tc>
+                <a:tc>
+                  <a:txBody>
+                    <a:bodyPr/>
+                    <a:lstStyle/>
+                    <a:p>
+                      <a:pPr algn="ctr"/>
+                      <a:endParaRPr lang="ru-RU" sz="1100" dirty="0"/>
+                    </a:p>
+                  </a:txBody>
+                  <a:tcPr/>
+                </a:tc>
+                <a:extLst>
+                  <a:ext uri="{0D108BD9-81ED-4DB2-BD59-A6C34878D82A}">
+                    <a16:rowId xmlns:a16="http://schemas.microsoft.com/office/drawing/2014/main" val="1647594467"/>
+                  </a:ext>
+                </a:extLst>
+              </a:tr>
+            </a:tbl>
+          </a:graphicData>
+        </a:graphic>
+      </p:graphicFrame>
+      <p:pic>
+        <p:nvPicPr>
+          <p:cNvPr id="7" name="Рисунок 6">
+            <a:extLst>
+              <a:ext uri="{FF2B5EF4-FFF2-40B4-BE49-F238E27FC236}">
+                <a16:creationId xmlns:a16="http://schemas.microsoft.com/office/drawing/2014/main" id="{E3F8B583-C5F4-D5E5-5A8D-D9626B704BD1}"/>
+              </a:ext>
+            </a:extLst>
+          </p:cNvPr>
+          <p:cNvPicPr>
+            <a:picLocks noChangeAspect="1"/>
+          </p:cNvPicPr>
+          <p:nvPr/>
+        </p:nvPicPr>
+        <p:blipFill>
+          <a:blip r:embed="rId3"/>
+          <a:stretch>
+            <a:fillRect/>
+          </a:stretch>
+        </p:blipFill>
+        <p:spPr>
+          <a:xfrm>
+            <a:off x="2147776" y="1444865"/>
+            <a:ext cx="3680657" cy="446025"/>
+          </a:xfrm>
+          <a:prstGeom prst="rect">
+            <a:avLst/>
+          </a:prstGeom>
+        </p:spPr>
+      </p:pic>
+      <p:pic>
+        <p:nvPicPr>
+          <p:cNvPr id="11" name="Рисунок 10">
+            <a:extLst>
+              <a:ext uri="{FF2B5EF4-FFF2-40B4-BE49-F238E27FC236}">
+                <a16:creationId xmlns:a16="http://schemas.microsoft.com/office/drawing/2014/main" id="{90717F49-7CED-17E8-C57F-14A5945708D1}"/>
+              </a:ext>
+            </a:extLst>
+          </p:cNvPr>
+          <p:cNvPicPr>
+            <a:picLocks noChangeAspect="1"/>
+          </p:cNvPicPr>
+          <p:nvPr/>
+        </p:nvPicPr>
+        <p:blipFill>
+          <a:blip r:embed="rId4"/>
+          <a:stretch>
+            <a:fillRect/>
+          </a:stretch>
+        </p:blipFill>
+        <p:spPr>
+          <a:xfrm>
+            <a:off x="8229601" y="1314241"/>
+            <a:ext cx="2430552" cy="576649"/>
+          </a:xfrm>
+          <a:prstGeom prst="rect">
+            <a:avLst/>
+          </a:prstGeom>
+        </p:spPr>
+      </p:pic>
+      <p:pic>
+        <p:nvPicPr>
+          <p:cNvPr id="15" name="Рисунок 14">
+            <a:extLst>
+              <a:ext uri="{FF2B5EF4-FFF2-40B4-BE49-F238E27FC236}">
+                <a16:creationId xmlns:a16="http://schemas.microsoft.com/office/drawing/2014/main" id="{D4A83FA0-1E95-7B31-97C6-E7FA695784F9}"/>
+              </a:ext>
+            </a:extLst>
+          </p:cNvPr>
+          <p:cNvPicPr>
+            <a:picLocks noChangeAspect="1"/>
+          </p:cNvPicPr>
+          <p:nvPr/>
+        </p:nvPicPr>
+        <p:blipFill>
+          <a:blip r:embed="rId5"/>
+          <a:stretch>
+            <a:fillRect/>
+          </a:stretch>
+        </p:blipFill>
+        <p:spPr>
+          <a:xfrm>
+            <a:off x="3386469" y="2326498"/>
+            <a:ext cx="1243557" cy="1645650"/>
+          </a:xfrm>
+          <a:prstGeom prst="rect">
+            <a:avLst/>
+          </a:prstGeom>
+        </p:spPr>
+      </p:pic>
+      <p:pic>
+        <p:nvPicPr>
+          <p:cNvPr id="18" name="Рисунок 17">
+            <a:extLst>
+              <a:ext uri="{FF2B5EF4-FFF2-40B4-BE49-F238E27FC236}">
+                <a16:creationId xmlns:a16="http://schemas.microsoft.com/office/drawing/2014/main" id="{F76A56C3-5BC7-5F95-88EC-DA288E66F352}"/>
+              </a:ext>
+            </a:extLst>
+          </p:cNvPr>
+          <p:cNvPicPr>
+            <a:picLocks noChangeAspect="1"/>
+          </p:cNvPicPr>
+          <p:nvPr/>
+        </p:nvPicPr>
+        <p:blipFill>
+          <a:blip r:embed="rId6"/>
+          <a:stretch>
+            <a:fillRect/>
+          </a:stretch>
+        </p:blipFill>
+        <p:spPr>
+          <a:xfrm>
+            <a:off x="8209802" y="2326498"/>
+            <a:ext cx="2450351" cy="1645650"/>
+          </a:xfrm>
+          <a:prstGeom prst="rect">
+            <a:avLst/>
+          </a:prstGeom>
+        </p:spPr>
+      </p:pic>
+      <p:pic>
+        <p:nvPicPr>
+          <p:cNvPr id="20" name="Рисунок 19">
+            <a:extLst>
+              <a:ext uri="{FF2B5EF4-FFF2-40B4-BE49-F238E27FC236}">
+                <a16:creationId xmlns:a16="http://schemas.microsoft.com/office/drawing/2014/main" id="{C08F6B5A-C9EE-441F-BAF0-9F87DA2847BF}"/>
+              </a:ext>
+            </a:extLst>
+          </p:cNvPr>
+          <p:cNvPicPr>
+            <a:picLocks noChangeAspect="1"/>
+          </p:cNvPicPr>
+          <p:nvPr/>
+        </p:nvPicPr>
+        <p:blipFill>
+          <a:blip r:embed="rId7"/>
+          <a:stretch>
+            <a:fillRect/>
+          </a:stretch>
+        </p:blipFill>
+        <p:spPr>
+          <a:xfrm>
+            <a:off x="4325965" y="4467340"/>
+            <a:ext cx="1124797" cy="879471"/>
+          </a:xfrm>
+          <a:prstGeom prst="rect">
+            <a:avLst/>
+          </a:prstGeom>
+        </p:spPr>
+      </p:pic>
+      <p:pic>
+        <p:nvPicPr>
+          <p:cNvPr id="22" name="Рисунок 21">
+            <a:extLst>
+              <a:ext uri="{FF2B5EF4-FFF2-40B4-BE49-F238E27FC236}">
+                <a16:creationId xmlns:a16="http://schemas.microsoft.com/office/drawing/2014/main" id="{48748B5A-E831-B0FA-1114-0B8714C3FC96}"/>
+              </a:ext>
+            </a:extLst>
+          </p:cNvPr>
+          <p:cNvPicPr>
+            <a:picLocks noChangeAspect="1"/>
+          </p:cNvPicPr>
+          <p:nvPr/>
+        </p:nvPicPr>
+        <p:blipFill>
+          <a:blip r:embed="rId8"/>
+          <a:stretch>
+            <a:fillRect/>
+          </a:stretch>
+        </p:blipFill>
+        <p:spPr>
+          <a:xfrm>
+            <a:off x="8568070" y="4441810"/>
+            <a:ext cx="1886213" cy="905001"/>
+          </a:xfrm>
+          <a:prstGeom prst="rect">
+            <a:avLst/>
+          </a:prstGeom>
+        </p:spPr>
+      </p:pic>
+      <p:pic>
+        <p:nvPicPr>
+          <p:cNvPr id="24" name="Рисунок 23">
+            <a:extLst>
+              <a:ext uri="{FF2B5EF4-FFF2-40B4-BE49-F238E27FC236}">
+                <a16:creationId xmlns:a16="http://schemas.microsoft.com/office/drawing/2014/main" id="{90572665-4469-C0E8-A281-DDE9D25D381F}"/>
+              </a:ext>
+            </a:extLst>
+          </p:cNvPr>
+          <p:cNvPicPr>
+            <a:picLocks noChangeAspect="1"/>
+          </p:cNvPicPr>
+          <p:nvPr/>
+        </p:nvPicPr>
+        <p:blipFill>
+          <a:blip r:embed="rId9"/>
+          <a:stretch>
+            <a:fillRect/>
+          </a:stretch>
+        </p:blipFill>
+        <p:spPr>
+          <a:xfrm>
+            <a:off x="2413591" y="5809947"/>
+            <a:ext cx="3295520" cy="911527"/>
+          </a:xfrm>
+          <a:prstGeom prst="rect">
+            <a:avLst/>
+          </a:prstGeom>
+        </p:spPr>
+      </p:pic>
+    </p:spTree>
+    <p:extLst>
+      <p:ext uri="{BB962C8B-B14F-4D97-AF65-F5344CB8AC3E}">
+        <p14:creationId xmlns:p14="http://schemas.microsoft.com/office/powerpoint/2010/main" val="4114266869"/>
+      </p:ext>
+    </p:extLst>
+  </p:cSld>
+  <p:clrMapOvr>
+    <a:masterClrMapping/>
+  </p:clrMapOvr>
+</p:sld>
+</file>
+
+<file path=ppt/slides/slide19.xml><?xml version="1.0" encoding="utf-8"?>
+<p:sld xmlns:a="http://schemas.openxmlformats.org/drawingml/2006/main" xmlns:r="http://schemas.openxmlformats.org/officeDocument/2006/relationships" xmlns:p="http://schemas.openxmlformats.org/presentationml/2006/main">
+  <p:cSld>
+    <p:spTree>
+      <p:nvGrpSpPr>
+        <p:cNvPr id="1" name=""/>
+        <p:cNvGrpSpPr/>
+        <p:nvPr/>
+      </p:nvGrpSpPr>
+      <p:grpSpPr>
+        <a:xfrm>
+          <a:off x="0" y="0"/>
+          <a:ext cx="0" cy="0"/>
+          <a:chOff x="0" y="0"/>
+          <a:chExt cx="0" cy="0"/>
+        </a:xfrm>
+      </p:grpSpPr>
+      <p:sp>
+        <p:nvSpPr>
+          <p:cNvPr id="2" name="Заголовок 1">
+            <a:extLst>
+              <a:ext uri="{FF2B5EF4-FFF2-40B4-BE49-F238E27FC236}">
+                <a16:creationId xmlns:a16="http://schemas.microsoft.com/office/drawing/2014/main" id="{01224F4E-81B3-0786-2937-18F8C57A386D}"/>
+              </a:ext>
+            </a:extLst>
+          </p:cNvPr>
+          <p:cNvSpPr>
+            <a:spLocks noGrp="1"/>
+          </p:cNvSpPr>
+          <p:nvPr>
+            <p:ph type="title"/>
+          </p:nvPr>
+        </p:nvSpPr>
+        <p:spPr/>
+        <p:txBody>
+          <a:bodyPr/>
+          <a:lstStyle/>
+          <a:p>
+            <a:r>
+              <a:rPr lang="ru-RU" dirty="0"/>
+              <a:t>Результат</a:t>
+            </a:r>
+          </a:p>
+        </p:txBody>
+      </p:sp>
+      <p:sp>
+        <p:nvSpPr>
+          <p:cNvPr id="3" name="Номер слайда 2">
+            <a:extLst>
+              <a:ext uri="{FF2B5EF4-FFF2-40B4-BE49-F238E27FC236}">
+                <a16:creationId xmlns:a16="http://schemas.microsoft.com/office/drawing/2014/main" id="{1C6226F2-88F6-8ABE-8DFA-53CD181C0099}"/>
+              </a:ext>
+            </a:extLst>
+          </p:cNvPr>
+          <p:cNvSpPr>
+            <a:spLocks noGrp="1"/>
+          </p:cNvSpPr>
+          <p:nvPr>
+            <p:ph type="sldNum" sz="quarter" idx="12"/>
+          </p:nvPr>
+        </p:nvSpPr>
+        <p:spPr/>
+        <p:txBody>
+          <a:bodyPr/>
+          <a:lstStyle/>
+          <a:p>
+            <a:fld id="{68327A13-2E2F-4F2E-8A82-1D293133525B}" type="slidenum">
+              <a:rPr lang="ru-RU" smtClean="0"/>
+              <a:t>19</a:t>
+            </a:fld>
+            <a:endParaRPr lang="ru-RU"/>
+          </a:p>
+        </p:txBody>
+      </p:sp>
+      <p:pic>
+        <p:nvPicPr>
+          <p:cNvPr id="9" name="Рисунок 8">
+            <a:extLst>
+              <a:ext uri="{FF2B5EF4-FFF2-40B4-BE49-F238E27FC236}">
+                <a16:creationId xmlns:a16="http://schemas.microsoft.com/office/drawing/2014/main" id="{A43521C2-69B2-FE2D-9FEC-A25BE01F741C}"/>
+              </a:ext>
+            </a:extLst>
+          </p:cNvPr>
+          <p:cNvPicPr>
+            <a:picLocks noChangeAspect="1"/>
+          </p:cNvPicPr>
+          <p:nvPr/>
+        </p:nvPicPr>
+        <p:blipFill>
+          <a:blip r:embed="rId2"/>
+          <a:stretch>
+            <a:fillRect/>
+          </a:stretch>
+        </p:blipFill>
+        <p:spPr>
+          <a:xfrm>
+            <a:off x="675167" y="1998529"/>
+            <a:ext cx="10325986" cy="3985136"/>
+          </a:xfrm>
+          <a:prstGeom prst="rect">
+            <a:avLst/>
+          </a:prstGeom>
+        </p:spPr>
+      </p:pic>
+    </p:spTree>
+    <p:extLst>
+      <p:ext uri="{BB962C8B-B14F-4D97-AF65-F5344CB8AC3E}">
+        <p14:creationId xmlns:p14="http://schemas.microsoft.com/office/powerpoint/2010/main" val="485000975"/>
+      </p:ext>
+    </p:extLst>
+  </p:cSld>
+  <p:clrMapOvr>
+    <a:masterClrMapping/>
+  </p:clrMapOvr>
+</p:sld>
+</file>
+
+<file path=ppt/slides/slide2.xml><?xml version="1.0" encoding="utf-8"?>
+<p:sld xmlns:a="http://schemas.openxmlformats.org/drawingml/2006/main" xmlns:r="http://schemas.openxmlformats.org/officeDocument/2006/relationships" xmlns:p="http://schemas.openxmlformats.org/presentationml/2006/main">
+  <p:cSld>
+    <p:spTree>
+      <p:nvGrpSpPr>
+        <p:cNvPr id="1" name=""/>
+        <p:cNvGrpSpPr/>
+        <p:nvPr/>
+      </p:nvGrpSpPr>
+      <p:grpSpPr>
+        <a:xfrm>
+          <a:off x="0" y="0"/>
+          <a:ext cx="0" cy="0"/>
+          <a:chOff x="0" y="0"/>
+          <a:chExt cx="0" cy="0"/>
+        </a:xfrm>
+      </p:grpSpPr>
+      <p:sp>
+        <p:nvSpPr>
+          <p:cNvPr id="2" name="Title 1">
+            <a:extLst>
+              <a:ext uri="{FF2B5EF4-FFF2-40B4-BE49-F238E27FC236}">
+                <a16:creationId xmlns:a16="http://schemas.microsoft.com/office/drawing/2014/main" id="{A6AFEFCA-721F-5CCD-3701-CDA33EDBA940}"/>
+              </a:ext>
+            </a:extLst>
+          </p:cNvPr>
+          <p:cNvSpPr>
+            <a:spLocks noGrp="1"/>
+          </p:cNvSpPr>
+          <p:nvPr>
+            <p:ph type="title"/>
+          </p:nvPr>
+        </p:nvSpPr>
+        <p:spPr>
+          <a:xfrm>
+            <a:off x="838200" y="0"/>
+            <a:ext cx="10515600" cy="1325563"/>
+          </a:xfrm>
+        </p:spPr>
+        <p:txBody>
+          <a:bodyPr/>
+          <a:lstStyle/>
+          <a:p>
+            <a:r>
+              <a:rPr lang="ru-RU" dirty="0">
+                <a:latin typeface="Times New Roman" panose="02020603050405020304" pitchFamily="18" charset="0"/>
+                <a:cs typeface="Times New Roman" panose="02020603050405020304" pitchFamily="18" charset="0"/>
+              </a:rPr>
+              <a:t>Оглавление</a:t>
+            </a:r>
+          </a:p>
+        </p:txBody>
+      </p:sp>
+      <p:graphicFrame>
+        <p:nvGraphicFramePr>
+          <p:cNvPr id="5" name="Content Placeholder 4">
+            <a:extLst>
+              <a:ext uri="{FF2B5EF4-FFF2-40B4-BE49-F238E27FC236}">
+                <a16:creationId xmlns:a16="http://schemas.microsoft.com/office/drawing/2014/main" id="{134175C9-EA50-F874-3BAB-64A97D1D1BB5}"/>
+              </a:ext>
+            </a:extLst>
+          </p:cNvPr>
+          <p:cNvGraphicFramePr>
+            <a:graphicFrameLocks noGrp="1"/>
+          </p:cNvGraphicFramePr>
+          <p:nvPr>
+            <p:ph idx="1"/>
+            <p:extLst>
+              <p:ext uri="{D42A27DB-BD31-4B8C-83A1-F6EECF244321}">
+                <p14:modId xmlns:p14="http://schemas.microsoft.com/office/powerpoint/2010/main" val="138371085"/>
+              </p:ext>
+            </p:extLst>
+          </p:nvPr>
+        </p:nvGraphicFramePr>
+        <p:xfrm>
+          <a:off x="838200" y="953450"/>
+          <a:ext cx="9966158" cy="5468372"/>
+        </p:xfrm>
+        <a:graphic>
+          <a:graphicData uri="http://schemas.openxmlformats.org/drawingml/2006/table">
+            <a:tbl>
+              <a:tblPr firstRow="1" bandRow="1">
+                <a:tableStyleId>{5C22544A-7EE6-4342-B048-85BDC9FD1C3A}</a:tableStyleId>
+              </a:tblPr>
+              <a:tblGrid>
+                <a:gridCol w="8412802">
+                  <a:extLst>
+                    <a:ext uri="{9D8B030D-6E8A-4147-A177-3AD203B41FA5}">
+                      <a16:colId xmlns:a16="http://schemas.microsoft.com/office/drawing/2014/main" val="141542384"/>
+                    </a:ext>
+                  </a:extLst>
+                </a:gridCol>
+                <a:gridCol w="1553356">
+                  <a:extLst>
+                    <a:ext uri="{9D8B030D-6E8A-4147-A177-3AD203B41FA5}">
+                      <a16:colId xmlns:a16="http://schemas.microsoft.com/office/drawing/2014/main" val="2830357005"/>
+                    </a:ext>
+                  </a:extLst>
+                </a:gridCol>
+              </a:tblGrid>
+              <a:tr h="382487">
+                <a:tc>
+                  <a:txBody>
+                    <a:bodyPr/>
+                    <a:lstStyle/>
+                    <a:p>
+                      <a:pPr algn="ctr"/>
+                      <a:r>
+                        <a:rPr lang="ru-RU" dirty="0">
+                          <a:latin typeface="Times New Roman" panose="02020603050405020304" pitchFamily="18" charset="0"/>
+                          <a:cs typeface="Times New Roman" panose="02020603050405020304" pitchFamily="18" charset="0"/>
+                        </a:rPr>
+                        <a:t>Название слайда</a:t>
+                      </a:r>
+                    </a:p>
+                  </a:txBody>
+                  <a:tcPr/>
+                </a:tc>
+                <a:tc>
+                  <a:txBody>
+                    <a:bodyPr/>
+                    <a:lstStyle/>
+                    <a:p>
+                      <a:pPr algn="ctr"/>
+                      <a:r>
+                        <a:rPr lang="ru-RU" dirty="0">
+                          <a:latin typeface="Times New Roman" panose="02020603050405020304" pitchFamily="18" charset="0"/>
+                          <a:cs typeface="Times New Roman" panose="02020603050405020304" pitchFamily="18" charset="0"/>
+                        </a:rPr>
+                        <a:t>Слайд</a:t>
+                      </a:r>
+                    </a:p>
+                  </a:txBody>
+                  <a:tcPr/>
+                </a:tc>
+                <a:extLst>
+                  <a:ext uri="{0D108BD9-81ED-4DB2-BD59-A6C34878D82A}">
+                    <a16:rowId xmlns:a16="http://schemas.microsoft.com/office/drawing/2014/main" val="3788713436"/>
+                  </a:ext>
+                </a:extLst>
+              </a:tr>
+              <a:tr h="288590">
+                <a:tc>
+                  <a:txBody>
+                    <a:bodyPr/>
+                    <a:lstStyle/>
+                    <a:p>
+                      <a:pPr marL="0" algn="ctr" defTabSz="914400" rtl="0" eaLnBrk="1" latinLnBrk="0" hangingPunct="1"/>
+                      <a:r>
+                        <a:rPr lang="ru-RU" sz="1400" kern="1200" dirty="0">
+                          <a:solidFill>
+                            <a:schemeClr val="dk1"/>
+                          </a:solidFill>
+                          <a:latin typeface="+mn-lt"/>
+                          <a:ea typeface="+mn-ea"/>
+                          <a:cs typeface="+mn-cs"/>
+                        </a:rPr>
+                        <a:t>Информация об инструменте</a:t>
+                      </a:r>
+                    </a:p>
+                  </a:txBody>
+                  <a:tcPr/>
+                </a:tc>
+                <a:tc>
+                  <a:txBody>
+                    <a:bodyPr/>
+                    <a:lstStyle/>
+                    <a:p>
+                      <a:pPr marL="0" algn="ctr" defTabSz="914400" rtl="0" eaLnBrk="1" latinLnBrk="0" hangingPunct="1"/>
+                      <a:r>
+                        <a:rPr lang="ru-RU" sz="1400" kern="1200" dirty="0">
+                          <a:solidFill>
+                            <a:schemeClr val="dk1"/>
+                          </a:solidFill>
+                          <a:latin typeface="Times New Roman" panose="02020603050405020304" pitchFamily="18" charset="0"/>
+                          <a:ea typeface="+mn-ea"/>
+                          <a:cs typeface="Times New Roman" panose="02020603050405020304" pitchFamily="18" charset="0"/>
+                        </a:rPr>
+                        <a:t>3</a:t>
+                      </a:r>
+                    </a:p>
+                  </a:txBody>
+                  <a:tcPr/>
+                </a:tc>
+                <a:extLst>
+                  <a:ext uri="{0D108BD9-81ED-4DB2-BD59-A6C34878D82A}">
+                    <a16:rowId xmlns:a16="http://schemas.microsoft.com/office/drawing/2014/main" val="512482158"/>
+                  </a:ext>
+                </a:extLst>
+              </a:tr>
+              <a:tr h="318739">
+                <a:tc>
+                  <a:txBody>
+                    <a:bodyPr/>
+                    <a:lstStyle/>
+                    <a:p>
+                      <a:pPr algn="ctr"/>
+                      <a:r>
+                        <a:rPr lang="ru-RU" sz="1400" dirty="0"/>
+                        <a:t>Анализируемые языки программирования</a:t>
+                      </a:r>
+                      <a:endParaRPr lang="ru-RU" sz="1400" dirty="0">
+                        <a:latin typeface="Times New Roman" panose="02020603050405020304" pitchFamily="18" charset="0"/>
+                        <a:cs typeface="Times New Roman" panose="02020603050405020304" pitchFamily="18" charset="0"/>
+                      </a:endParaRPr>
+                    </a:p>
+                  </a:txBody>
+                  <a:tcPr/>
+                </a:tc>
+                <a:tc>
+                  <a:txBody>
+                    <a:bodyPr/>
+                    <a:lstStyle/>
+                    <a:p>
+                      <a:pPr algn="ctr"/>
+                      <a:r>
+                        <a:rPr lang="ru-RU" sz="1400" dirty="0">
+                          <a:latin typeface="Times New Roman" panose="02020603050405020304" pitchFamily="18" charset="0"/>
+                          <a:cs typeface="Times New Roman" panose="02020603050405020304" pitchFamily="18" charset="0"/>
+                        </a:rPr>
+                        <a:t>4</a:t>
+                      </a:r>
+                    </a:p>
+                  </a:txBody>
+                  <a:tcPr/>
+                </a:tc>
+                <a:extLst>
+                  <a:ext uri="{0D108BD9-81ED-4DB2-BD59-A6C34878D82A}">
+                    <a16:rowId xmlns:a16="http://schemas.microsoft.com/office/drawing/2014/main" val="636047608"/>
+                  </a:ext>
+                </a:extLst>
+              </a:tr>
+              <a:tr h="318739">
+                <a:tc>
+                  <a:txBody>
+                    <a:bodyPr/>
+                    <a:lstStyle/>
+                    <a:p>
+                      <a:pPr algn="ctr"/>
+                      <a:r>
+                        <a:rPr lang="ru-RU" sz="1400" dirty="0"/>
+                        <a:t>Начало статического анализа кода</a:t>
+                      </a:r>
+                      <a:endParaRPr lang="ru-RU" sz="1400" dirty="0">
+                        <a:latin typeface="Times New Roman" panose="02020603050405020304" pitchFamily="18" charset="0"/>
+                        <a:cs typeface="Times New Roman" panose="02020603050405020304" pitchFamily="18" charset="0"/>
+                      </a:endParaRPr>
+                    </a:p>
+                  </a:txBody>
+                  <a:tcPr/>
+                </a:tc>
+                <a:tc>
+                  <a:txBody>
+                    <a:bodyPr/>
+                    <a:lstStyle/>
+                    <a:p>
+                      <a:pPr algn="ctr"/>
+                      <a:r>
+                        <a:rPr lang="ru-RU" sz="1400" dirty="0">
+                          <a:latin typeface="Times New Roman" panose="02020603050405020304" pitchFamily="18" charset="0"/>
+                          <a:cs typeface="Times New Roman" panose="02020603050405020304" pitchFamily="18" charset="0"/>
+                        </a:rPr>
+                        <a:t>5</a:t>
+                      </a:r>
+                    </a:p>
+                  </a:txBody>
+                  <a:tcPr/>
+                </a:tc>
+                <a:extLst>
+                  <a:ext uri="{0D108BD9-81ED-4DB2-BD59-A6C34878D82A}">
+                    <a16:rowId xmlns:a16="http://schemas.microsoft.com/office/drawing/2014/main" val="2781002657"/>
+                  </a:ext>
+                </a:extLst>
+              </a:tr>
+              <a:tr h="318739">
+                <a:tc>
+                  <a:txBody>
+                    <a:bodyPr/>
+                    <a:lstStyle/>
+                    <a:p>
+                      <a:pPr algn="ctr"/>
+                      <a:r>
+                        <a:rPr lang="ru-RU" sz="1400" dirty="0"/>
+                        <a:t>Уведомление о начале работы</a:t>
+                      </a:r>
+                      <a:endParaRPr lang="ru-RU" sz="1400" dirty="0">
+                        <a:latin typeface="Times New Roman" panose="02020603050405020304" pitchFamily="18" charset="0"/>
+                        <a:cs typeface="Times New Roman" panose="02020603050405020304" pitchFamily="18" charset="0"/>
+                      </a:endParaRPr>
+                    </a:p>
+                  </a:txBody>
+                  <a:tcPr/>
+                </a:tc>
+                <a:tc>
+                  <a:txBody>
+                    <a:bodyPr/>
+                    <a:lstStyle/>
+                    <a:p>
+                      <a:pPr algn="ctr"/>
+                      <a:r>
+                        <a:rPr lang="ru-RU" sz="1400" dirty="0">
+                          <a:latin typeface="Times New Roman" panose="02020603050405020304" pitchFamily="18" charset="0"/>
+                          <a:cs typeface="Times New Roman" panose="02020603050405020304" pitchFamily="18" charset="0"/>
+                        </a:rPr>
+                        <a:t>6</a:t>
+                      </a:r>
+                    </a:p>
+                  </a:txBody>
+                  <a:tcPr/>
+                </a:tc>
+                <a:extLst>
+                  <a:ext uri="{0D108BD9-81ED-4DB2-BD59-A6C34878D82A}">
+                    <a16:rowId xmlns:a16="http://schemas.microsoft.com/office/drawing/2014/main" val="282443300"/>
+                  </a:ext>
+                </a:extLst>
+              </a:tr>
+              <a:tr h="318739">
+                <a:tc>
+                  <a:txBody>
+                    <a:bodyPr/>
+                    <a:lstStyle/>
+                    <a:p>
+                      <a:pPr algn="ctr"/>
+                      <a:r>
+                        <a:rPr lang="ru-RU" sz="1400" dirty="0"/>
+                        <a:t>Уведомление об успешной проверке</a:t>
+                      </a:r>
+                      <a:endParaRPr lang="ru-RU" sz="1400" dirty="0">
+                        <a:latin typeface="Times New Roman" panose="02020603050405020304" pitchFamily="18" charset="0"/>
+                        <a:cs typeface="Times New Roman" panose="02020603050405020304" pitchFamily="18" charset="0"/>
+                      </a:endParaRPr>
+                    </a:p>
+                  </a:txBody>
+                  <a:tcPr/>
+                </a:tc>
+                <a:tc>
+                  <a:txBody>
+                    <a:bodyPr/>
+                    <a:lstStyle/>
+                    <a:p>
+                      <a:pPr algn="ctr"/>
+                      <a:r>
+                        <a:rPr lang="ru-RU" sz="1400" dirty="0">
+                          <a:latin typeface="Times New Roman" panose="02020603050405020304" pitchFamily="18" charset="0"/>
+                          <a:cs typeface="Times New Roman" panose="02020603050405020304" pitchFamily="18" charset="0"/>
+                        </a:rPr>
+                        <a:t>7</a:t>
+                      </a:r>
+                    </a:p>
+                  </a:txBody>
+                  <a:tcPr/>
+                </a:tc>
+                <a:extLst>
+                  <a:ext uri="{0D108BD9-81ED-4DB2-BD59-A6C34878D82A}">
+                    <a16:rowId xmlns:a16="http://schemas.microsoft.com/office/drawing/2014/main" val="2623708350"/>
+                  </a:ext>
+                </a:extLst>
+              </a:tr>
+              <a:tr h="318739">
+                <a:tc>
+                  <a:txBody>
+                    <a:bodyPr/>
+                    <a:lstStyle/>
+                    <a:p>
+                      <a:pPr algn="ctr"/>
+                      <a:r>
+                        <a:rPr lang="ru-RU" sz="1400" dirty="0"/>
+                        <a:t>Первая критическая ошибка (</a:t>
+                      </a:r>
+                      <a:r>
+                        <a:rPr lang="ru-RU" altLang="ru-RU" sz="1400" i="1" dirty="0" err="1"/>
+                        <a:t>shared_ptr</a:t>
+                      </a:r>
+                      <a:r>
+                        <a:rPr lang="ru-RU" altLang="ru-RU" sz="1400" i="1" dirty="0"/>
+                        <a:t> </a:t>
+                      </a:r>
+                      <a:r>
+                        <a:rPr lang="ru-RU" altLang="ru-RU" sz="1400" dirty="0"/>
+                        <a:t>между </a:t>
+                      </a:r>
+                      <a:r>
+                        <a:rPr lang="ru-RU" altLang="ru-RU" sz="1400" i="1" dirty="0" err="1"/>
+                        <a:t>Actor</a:t>
+                      </a:r>
+                      <a:r>
+                        <a:rPr lang="ru-RU" altLang="ru-RU" sz="1400" dirty="0"/>
+                        <a:t> и </a:t>
+                      </a:r>
+                      <a:r>
+                        <a:rPr lang="ru-RU" altLang="ru-RU" sz="1400" i="1" dirty="0"/>
+                        <a:t>Movie</a:t>
+                      </a:r>
+                      <a:r>
+                        <a:rPr lang="ru-RU" altLang="ru-RU" sz="1400" dirty="0"/>
+                        <a:t>)</a:t>
+                      </a:r>
+                      <a:endParaRPr lang="ru-RU" sz="1400" dirty="0">
+                        <a:latin typeface="Times New Roman" panose="02020603050405020304" pitchFamily="18" charset="0"/>
+                        <a:cs typeface="Times New Roman" panose="02020603050405020304" pitchFamily="18" charset="0"/>
+                      </a:endParaRPr>
+                    </a:p>
+                  </a:txBody>
+                  <a:tcPr/>
+                </a:tc>
+                <a:tc>
+                  <a:txBody>
+                    <a:bodyPr/>
+                    <a:lstStyle/>
+                    <a:p>
+                      <a:pPr algn="ctr"/>
+                      <a:r>
+                        <a:rPr lang="ru-RU" sz="1400" dirty="0">
+                          <a:latin typeface="Times New Roman" panose="02020603050405020304" pitchFamily="18" charset="0"/>
+                          <a:cs typeface="Times New Roman" panose="02020603050405020304" pitchFamily="18" charset="0"/>
+                        </a:rPr>
+                        <a:t>8</a:t>
+                      </a:r>
+                    </a:p>
+                  </a:txBody>
+                  <a:tcPr/>
+                </a:tc>
+                <a:extLst>
+                  <a:ext uri="{0D108BD9-81ED-4DB2-BD59-A6C34878D82A}">
+                    <a16:rowId xmlns:a16="http://schemas.microsoft.com/office/drawing/2014/main" val="2857371628"/>
+                  </a:ext>
+                </a:extLst>
+              </a:tr>
+              <a:tr h="318739">
+                <a:tc>
+                  <a:txBody>
+                    <a:bodyPr/>
+                    <a:lstStyle/>
+                    <a:p>
+                      <a:pPr algn="ctr"/>
+                      <a:r>
+                        <a:rPr lang="ru-RU" sz="1400" dirty="0"/>
+                        <a:t>Вторая критическая ошибка(бесконечный цикл у </a:t>
+                      </a:r>
+                      <a:r>
+                        <a:rPr lang="en-US" sz="1400" i="1" dirty="0" err="1"/>
+                        <a:t>add_geners</a:t>
+                      </a:r>
+                      <a:r>
+                        <a:rPr lang="en-US" sz="1400" i="1" dirty="0"/>
+                        <a:t> </a:t>
+                      </a:r>
+                      <a:r>
+                        <a:rPr lang="ru-RU" sz="1400" dirty="0"/>
+                        <a:t>и </a:t>
+                      </a:r>
+                      <a:r>
+                        <a:rPr lang="en-US" sz="1400" i="1" dirty="0" err="1"/>
+                        <a:t>add_actors</a:t>
+                      </a:r>
+                      <a:r>
+                        <a:rPr lang="en-US" sz="1400" dirty="0"/>
+                        <a:t>)</a:t>
+                      </a:r>
+                      <a:endParaRPr lang="ru-RU" sz="1400" dirty="0">
+                        <a:latin typeface="Times New Roman" panose="02020603050405020304" pitchFamily="18" charset="0"/>
+                        <a:cs typeface="Times New Roman" panose="02020603050405020304" pitchFamily="18" charset="0"/>
+                      </a:endParaRPr>
+                    </a:p>
+                  </a:txBody>
+                  <a:tcPr/>
+                </a:tc>
+                <a:tc>
+                  <a:txBody>
+                    <a:bodyPr/>
+                    <a:lstStyle/>
+                    <a:p>
+                      <a:pPr algn="ctr"/>
+                      <a:r>
+                        <a:rPr lang="ru-RU" sz="1400" dirty="0">
+                          <a:latin typeface="Times New Roman" panose="02020603050405020304" pitchFamily="18" charset="0"/>
+                          <a:cs typeface="Times New Roman" panose="02020603050405020304" pitchFamily="18" charset="0"/>
+                        </a:rPr>
+                        <a:t>9</a:t>
+                      </a:r>
+                    </a:p>
+                  </a:txBody>
+                  <a:tcPr/>
+                </a:tc>
+                <a:extLst>
+                  <a:ext uri="{0D108BD9-81ED-4DB2-BD59-A6C34878D82A}">
+                    <a16:rowId xmlns:a16="http://schemas.microsoft.com/office/drawing/2014/main" val="4261147790"/>
+                  </a:ext>
+                </a:extLst>
+              </a:tr>
+              <a:tr h="318739">
+                <a:tc>
+                  <a:txBody>
+                    <a:bodyPr/>
+                    <a:lstStyle/>
+                    <a:p>
+                      <a:pPr algn="ctr"/>
+                      <a:r>
+                        <a:rPr lang="ru-RU" sz="1400" dirty="0"/>
+                        <a:t>Третья критическая ошибка (Хранение </a:t>
+                      </a:r>
+                      <a:r>
+                        <a:rPr lang="ru-RU" sz="1400" i="1" dirty="0"/>
+                        <a:t>Movie* </a:t>
+                      </a:r>
+                      <a:r>
+                        <a:rPr lang="ru-RU" sz="1400" dirty="0"/>
+                        <a:t>вместо </a:t>
+                      </a:r>
+                      <a:r>
+                        <a:rPr lang="ru-RU" sz="1400" i="1" dirty="0" err="1"/>
+                        <a:t>weak_ptr</a:t>
+                      </a:r>
+                      <a:r>
+                        <a:rPr lang="ru-RU" sz="1400" i="1" dirty="0"/>
+                        <a:t>&lt;Movie&gt;</a:t>
+                      </a:r>
+                      <a:r>
+                        <a:rPr lang="ru-RU" sz="1400" dirty="0"/>
+                        <a:t>)</a:t>
+                      </a:r>
+                      <a:endParaRPr lang="ru-RU" sz="1400" dirty="0">
+                        <a:latin typeface="Times New Roman" panose="02020603050405020304" pitchFamily="18" charset="0"/>
+                        <a:cs typeface="Times New Roman" panose="02020603050405020304" pitchFamily="18" charset="0"/>
+                      </a:endParaRPr>
+                    </a:p>
+                  </a:txBody>
+                  <a:tcPr/>
+                </a:tc>
+                <a:tc>
+                  <a:txBody>
+                    <a:bodyPr/>
+                    <a:lstStyle/>
+                    <a:p>
+                      <a:pPr algn="ctr"/>
+                      <a:r>
+                        <a:rPr lang="ru-RU" sz="1400" dirty="0">
+                          <a:latin typeface="Times New Roman" panose="02020603050405020304" pitchFamily="18" charset="0"/>
+                          <a:cs typeface="Times New Roman" panose="02020603050405020304" pitchFamily="18" charset="0"/>
+                        </a:rPr>
+                        <a:t>10</a:t>
+                      </a:r>
+                    </a:p>
+                  </a:txBody>
+                  <a:tcPr/>
+                </a:tc>
+                <a:extLst>
+                  <a:ext uri="{0D108BD9-81ED-4DB2-BD59-A6C34878D82A}">
+                    <a16:rowId xmlns:a16="http://schemas.microsoft.com/office/drawing/2014/main" val="1696005487"/>
+                  </a:ext>
+                </a:extLst>
+              </a:tr>
+              <a:tr h="318739">
+                <a:tc>
+                  <a:txBody>
+                    <a:bodyPr/>
+                    <a:lstStyle/>
+                    <a:p>
+                      <a:pPr algn="ctr"/>
+                      <a:r>
+                        <a:rPr lang="ru-RU" sz="1400" dirty="0"/>
+                        <a:t>Четвертая критическая ошибка(не неинициализированная переменная в </a:t>
+                      </a:r>
+                      <a:r>
+                        <a:rPr lang="en-US" sz="1400" i="1" dirty="0"/>
+                        <a:t>order</a:t>
+                      </a:r>
+                      <a:r>
+                        <a:rPr lang="en-US" sz="1400" dirty="0"/>
+                        <a:t>)</a:t>
+                      </a:r>
+                      <a:endParaRPr lang="ru-RU" sz="1400" dirty="0">
+                        <a:latin typeface="Times New Roman" panose="02020603050405020304" pitchFamily="18" charset="0"/>
+                        <a:cs typeface="Times New Roman" panose="02020603050405020304" pitchFamily="18" charset="0"/>
+                      </a:endParaRPr>
+                    </a:p>
+                  </a:txBody>
+                  <a:tcPr/>
+                </a:tc>
+                <a:tc>
+                  <a:txBody>
+                    <a:bodyPr/>
+                    <a:lstStyle/>
+                    <a:p>
+                      <a:pPr algn="ctr"/>
+                      <a:r>
+                        <a:rPr lang="ru-RU" sz="1400" dirty="0">
+                          <a:latin typeface="Times New Roman" panose="02020603050405020304" pitchFamily="18" charset="0"/>
+                          <a:cs typeface="Times New Roman" panose="02020603050405020304" pitchFamily="18" charset="0"/>
+                        </a:rPr>
+                        <a:t>11</a:t>
+                      </a:r>
+                    </a:p>
+                  </a:txBody>
+                  <a:tcPr/>
+                </a:tc>
+                <a:extLst>
+                  <a:ext uri="{0D108BD9-81ED-4DB2-BD59-A6C34878D82A}">
+                    <a16:rowId xmlns:a16="http://schemas.microsoft.com/office/drawing/2014/main" val="428513589"/>
+                  </a:ext>
+                </a:extLst>
+              </a:tr>
+              <a:tr h="318739">
+                <a:tc>
+                  <a:txBody>
+                    <a:bodyPr/>
+                    <a:lstStyle/>
+                    <a:p>
+                      <a:pPr algn="ctr"/>
+                      <a:r>
+                        <a:rPr lang="ru-RU" sz="1400" dirty="0"/>
+                        <a:t>Пятая критическая ошибка</a:t>
+                      </a:r>
+                      <a:r>
+                        <a:rPr lang="en-US" sz="1400" dirty="0"/>
+                        <a:t> (</a:t>
+                      </a:r>
+                      <a:r>
+                        <a:rPr lang="ru-RU" sz="1400" dirty="0"/>
+                        <a:t>нулевой указатель)</a:t>
+                      </a:r>
+                      <a:endParaRPr lang="ru-RU" sz="1400" dirty="0">
+                        <a:latin typeface="Times New Roman" panose="02020603050405020304" pitchFamily="18" charset="0"/>
+                        <a:cs typeface="Times New Roman" panose="02020603050405020304" pitchFamily="18" charset="0"/>
+                      </a:endParaRPr>
+                    </a:p>
+                  </a:txBody>
+                  <a:tcPr/>
+                </a:tc>
+                <a:tc>
+                  <a:txBody>
+                    <a:bodyPr/>
+                    <a:lstStyle/>
+                    <a:p>
+                      <a:pPr algn="ctr"/>
+                      <a:r>
+                        <a:rPr lang="ru-RU" sz="1400" dirty="0">
+                          <a:latin typeface="Times New Roman" panose="02020603050405020304" pitchFamily="18" charset="0"/>
+                          <a:cs typeface="Times New Roman" panose="02020603050405020304" pitchFamily="18" charset="0"/>
+                        </a:rPr>
+                        <a:t>12</a:t>
+                      </a:r>
+                    </a:p>
+                  </a:txBody>
+                  <a:tcPr/>
+                </a:tc>
+                <a:extLst>
+                  <a:ext uri="{0D108BD9-81ED-4DB2-BD59-A6C34878D82A}">
+                    <a16:rowId xmlns:a16="http://schemas.microsoft.com/office/drawing/2014/main" val="3901408089"/>
+                  </a:ext>
+                </a:extLst>
+              </a:tr>
+              <a:tr h="318739">
+                <a:tc>
+                  <a:txBody>
+                    <a:bodyPr/>
+                    <a:lstStyle/>
+                    <a:p>
+                      <a:pPr algn="ctr"/>
+                      <a:r>
+                        <a:rPr lang="ru-RU" sz="1400" dirty="0"/>
+                        <a:t>Шестая критическая ошибка(циклическая зависимость у </a:t>
+                      </a:r>
+                      <a:r>
+                        <a:rPr lang="ru-RU" sz="1400" i="1" dirty="0" err="1"/>
+                        <a:t>Movie.h</a:t>
+                      </a:r>
+                      <a:r>
+                        <a:rPr lang="ru-RU" sz="1400" dirty="0"/>
+                        <a:t>)</a:t>
+                      </a:r>
+                      <a:endParaRPr lang="ru-RU" sz="1400" i="1" dirty="0">
+                        <a:latin typeface="Times New Roman" panose="02020603050405020304" pitchFamily="18" charset="0"/>
+                        <a:cs typeface="Times New Roman" panose="02020603050405020304" pitchFamily="18" charset="0"/>
+                      </a:endParaRPr>
+                    </a:p>
+                  </a:txBody>
+                  <a:tcPr/>
+                </a:tc>
+                <a:tc>
+                  <a:txBody>
+                    <a:bodyPr/>
+                    <a:lstStyle/>
+                    <a:p>
+                      <a:pPr algn="ctr"/>
+                      <a:r>
+                        <a:rPr lang="ru-RU" sz="1400" dirty="0">
+                          <a:latin typeface="Times New Roman" panose="02020603050405020304" pitchFamily="18" charset="0"/>
+                          <a:cs typeface="Times New Roman" panose="02020603050405020304" pitchFamily="18" charset="0"/>
+                        </a:rPr>
+                        <a:t>13</a:t>
+                      </a:r>
+                    </a:p>
+                  </a:txBody>
+                  <a:tcPr/>
+                </a:tc>
+                <a:extLst>
+                  <a:ext uri="{0D108BD9-81ED-4DB2-BD59-A6C34878D82A}">
+                    <a16:rowId xmlns:a16="http://schemas.microsoft.com/office/drawing/2014/main" val="2071910897"/>
+                  </a:ext>
+                </a:extLst>
+              </a:tr>
+              <a:tr h="318739">
+                <a:tc>
+                  <a:txBody>
+                    <a:bodyPr/>
+                    <a:lstStyle/>
+                    <a:p>
+                      <a:pPr algn="ctr"/>
+                      <a:r>
+                        <a:rPr lang="ru-RU" sz="1400" dirty="0"/>
+                        <a:t>Первая НЕ критическая ошибка(не инициализирован </a:t>
+                      </a:r>
+                      <a:r>
+                        <a:rPr lang="ru-RU" sz="1400" i="1" dirty="0" err="1"/>
+                        <a:t>std</a:t>
+                      </a:r>
+                      <a:r>
+                        <a:rPr lang="ru-RU" sz="1400" i="1" dirty="0"/>
+                        <a:t>::</a:t>
+                      </a:r>
+                      <a:r>
+                        <a:rPr lang="ru-RU" sz="1400" i="1" dirty="0" err="1"/>
+                        <a:t>shared_ptr</a:t>
+                      </a:r>
+                      <a:r>
+                        <a:rPr lang="ru-RU" sz="1400" i="1" dirty="0"/>
+                        <a:t>&lt;Movie&gt; </a:t>
+                      </a:r>
+                      <a:r>
+                        <a:rPr lang="ru-RU" sz="1400" i="1" dirty="0" err="1"/>
+                        <a:t>movie</a:t>
+                      </a:r>
+                      <a:r>
+                        <a:rPr lang="ru-RU" sz="1400" dirty="0"/>
+                        <a:t>)</a:t>
+                      </a:r>
+                      <a:endParaRPr lang="ru-RU" sz="1400" dirty="0">
+                        <a:latin typeface="Times New Roman" panose="02020603050405020304" pitchFamily="18" charset="0"/>
+                        <a:cs typeface="Times New Roman" panose="02020603050405020304" pitchFamily="18" charset="0"/>
+                      </a:endParaRPr>
+                    </a:p>
+                  </a:txBody>
+                  <a:tcPr/>
+                </a:tc>
+                <a:tc>
+                  <a:txBody>
+                    <a:bodyPr/>
+                    <a:lstStyle/>
+                    <a:p>
+                      <a:pPr algn="ctr"/>
+                      <a:r>
+                        <a:rPr lang="ru-RU" sz="1400" dirty="0">
+                          <a:latin typeface="Times New Roman" panose="02020603050405020304" pitchFamily="18" charset="0"/>
+                          <a:cs typeface="Times New Roman" panose="02020603050405020304" pitchFamily="18" charset="0"/>
+                        </a:rPr>
+                        <a:t>14</a:t>
+                      </a:r>
+                    </a:p>
+                  </a:txBody>
+                  <a:tcPr/>
+                </a:tc>
+                <a:extLst>
+                  <a:ext uri="{0D108BD9-81ED-4DB2-BD59-A6C34878D82A}">
+                    <a16:rowId xmlns:a16="http://schemas.microsoft.com/office/drawing/2014/main" val="1797833900"/>
+                  </a:ext>
+                </a:extLst>
+              </a:tr>
+              <a:tr h="318739">
+                <a:tc>
+                  <a:txBody>
+                    <a:bodyPr/>
+                    <a:lstStyle/>
+                    <a:p>
+                      <a:pPr algn="ctr"/>
+                      <a:r>
+                        <a:rPr lang="ru-RU" sz="1400" dirty="0"/>
+                        <a:t>Вторая НЕ критическая ошибка (добавление актеров, вместо </a:t>
+                      </a:r>
+                      <a:r>
+                        <a:rPr lang="ru-RU" sz="1400" dirty="0" err="1"/>
+                        <a:t>режисеров</a:t>
+                      </a:r>
+                      <a:r>
+                        <a:rPr lang="ru-RU" sz="1400" dirty="0"/>
+                        <a:t>)</a:t>
+                      </a:r>
+                      <a:endParaRPr lang="ru-RU" sz="1400" dirty="0">
+                        <a:latin typeface="Times New Roman" panose="02020603050405020304" pitchFamily="18" charset="0"/>
+                        <a:cs typeface="Times New Roman" panose="02020603050405020304" pitchFamily="18" charset="0"/>
+                      </a:endParaRPr>
+                    </a:p>
+                  </a:txBody>
+                  <a:tcPr/>
+                </a:tc>
+                <a:tc>
+                  <a:txBody>
+                    <a:bodyPr/>
+                    <a:lstStyle/>
+                    <a:p>
+                      <a:pPr algn="ctr"/>
+                      <a:r>
+                        <a:rPr lang="ru-RU" sz="1400" dirty="0">
+                          <a:latin typeface="Times New Roman" panose="02020603050405020304" pitchFamily="18" charset="0"/>
+                          <a:cs typeface="Times New Roman" panose="02020603050405020304" pitchFamily="18" charset="0"/>
+                        </a:rPr>
+                        <a:t>15</a:t>
+                      </a:r>
+                    </a:p>
+                  </a:txBody>
+                  <a:tcPr/>
+                </a:tc>
+                <a:extLst>
+                  <a:ext uri="{0D108BD9-81ED-4DB2-BD59-A6C34878D82A}">
+                    <a16:rowId xmlns:a16="http://schemas.microsoft.com/office/drawing/2014/main" val="2102275894"/>
+                  </a:ext>
+                </a:extLst>
+              </a:tr>
+              <a:tr h="318739">
+                <a:tc>
+                  <a:txBody>
+                    <a:bodyPr/>
+                    <a:lstStyle/>
+                    <a:p>
+                      <a:pPr algn="ctr"/>
+                      <a:r>
+                        <a:rPr lang="ru-RU" sz="1400" dirty="0"/>
+                        <a:t>Еще одна критическая ошибка(</a:t>
+                      </a:r>
+                      <a:r>
+                        <a:rPr lang="ru-RU" sz="1400" dirty="0" err="1"/>
+                        <a:t>отсутсвие</a:t>
+                      </a:r>
+                      <a:r>
+                        <a:rPr lang="ru-RU" sz="1400" dirty="0"/>
+                        <a:t> указателя на константное значение)</a:t>
+                      </a:r>
+                      <a:endParaRPr lang="ru-RU" sz="1400" dirty="0">
+                        <a:latin typeface="Times New Roman" panose="02020603050405020304" pitchFamily="18" charset="0"/>
+                        <a:cs typeface="Times New Roman" panose="02020603050405020304" pitchFamily="18" charset="0"/>
+                      </a:endParaRPr>
+                    </a:p>
+                  </a:txBody>
+                  <a:tcPr/>
+                </a:tc>
+                <a:tc>
+                  <a:txBody>
+                    <a:bodyPr/>
+                    <a:lstStyle/>
+                    <a:p>
+                      <a:pPr algn="ctr"/>
+                      <a:r>
+                        <a:rPr lang="ru-RU" sz="1400" dirty="0">
+                          <a:latin typeface="Times New Roman" panose="02020603050405020304" pitchFamily="18" charset="0"/>
+                          <a:cs typeface="Times New Roman" panose="02020603050405020304" pitchFamily="18" charset="0"/>
+                        </a:rPr>
+                        <a:t>16</a:t>
+                      </a:r>
+                    </a:p>
+                  </a:txBody>
+                  <a:tcPr/>
+                </a:tc>
+                <a:extLst>
+                  <a:ext uri="{0D108BD9-81ED-4DB2-BD59-A6C34878D82A}">
+                    <a16:rowId xmlns:a16="http://schemas.microsoft.com/office/drawing/2014/main" val="542826930"/>
+                  </a:ext>
+                </a:extLst>
+              </a:tr>
+              <a:tr h="318739">
+                <a:tc>
+                  <a:txBody>
+                    <a:bodyPr/>
+                    <a:lstStyle/>
+                    <a:p>
+                      <a:pPr algn="ctr"/>
+                      <a:r>
+                        <a:rPr lang="ru-RU" sz="1400" dirty="0">
+                          <a:latin typeface="Times New Roman" panose="02020603050405020304" pitchFamily="18" charset="0"/>
+                          <a:cs typeface="Times New Roman" panose="02020603050405020304" pitchFamily="18" charset="0"/>
+                        </a:rPr>
+                        <a:t>Выводы</a:t>
+                      </a:r>
+                    </a:p>
+                  </a:txBody>
+                  <a:tcPr/>
+                </a:tc>
+                <a:tc>
+                  <a:txBody>
+                    <a:bodyPr/>
+                    <a:lstStyle/>
+                    <a:p>
+                      <a:pPr algn="ctr"/>
+                      <a:r>
+                        <a:rPr lang="ru-RU" sz="1400" dirty="0">
+                          <a:latin typeface="Times New Roman" panose="02020603050405020304" pitchFamily="18" charset="0"/>
+                          <a:cs typeface="Times New Roman" panose="02020603050405020304" pitchFamily="18" charset="0"/>
+                        </a:rPr>
+                        <a:t>17</a:t>
+                      </a:r>
+                    </a:p>
+                  </a:txBody>
+                  <a:tcPr/>
+                </a:tc>
+                <a:extLst>
+                  <a:ext uri="{0D108BD9-81ED-4DB2-BD59-A6C34878D82A}">
+                    <a16:rowId xmlns:a16="http://schemas.microsoft.com/office/drawing/2014/main" val="1947315688"/>
+                  </a:ext>
+                </a:extLst>
+              </a:tr>
+              <a:tr h="318739">
+                <a:tc>
+                  <a:txBody>
+                    <a:bodyPr/>
+                    <a:lstStyle/>
+                    <a:p>
+                      <a:pPr algn="ctr"/>
+                      <a:r>
+                        <a:rPr lang="ru-RU" sz="1400" dirty="0"/>
+                        <a:t>Список источников и пожеланий</a:t>
+                      </a:r>
+                      <a:endParaRPr lang="ru-RU" sz="1400" dirty="0">
+                        <a:latin typeface="Times New Roman" panose="02020603050405020304" pitchFamily="18" charset="0"/>
+                        <a:cs typeface="Times New Roman" panose="02020603050405020304" pitchFamily="18" charset="0"/>
+                      </a:endParaRPr>
+                    </a:p>
+                  </a:txBody>
+                  <a:tcPr/>
+                </a:tc>
+                <a:tc>
+                  <a:txBody>
+                    <a:bodyPr/>
+                    <a:lstStyle/>
+                    <a:p>
+                      <a:pPr algn="ctr"/>
+                      <a:r>
+                        <a:rPr lang="ru-RU" sz="1400" dirty="0">
+                          <a:latin typeface="Times New Roman" panose="02020603050405020304" pitchFamily="18" charset="0"/>
+                          <a:cs typeface="Times New Roman" panose="02020603050405020304" pitchFamily="18" charset="0"/>
+                        </a:rPr>
+                        <a:t>18</a:t>
+                      </a:r>
+                    </a:p>
+                  </a:txBody>
+                  <a:tcPr/>
+                </a:tc>
+                <a:extLst>
+                  <a:ext uri="{0D108BD9-81ED-4DB2-BD59-A6C34878D82A}">
+                    <a16:rowId xmlns:a16="http://schemas.microsoft.com/office/drawing/2014/main" val="51082828"/>
+                  </a:ext>
+                </a:extLst>
+              </a:tr>
+            </a:tbl>
+          </a:graphicData>
+        </a:graphic>
+      </p:graphicFrame>
+      <p:sp>
+        <p:nvSpPr>
+          <p:cNvPr id="4" name="Slide Number Placeholder 3">
+            <a:extLst>
+              <a:ext uri="{FF2B5EF4-FFF2-40B4-BE49-F238E27FC236}">
+                <a16:creationId xmlns:a16="http://schemas.microsoft.com/office/drawing/2014/main" id="{E05793A1-D632-1688-2E92-6187FC1DF401}"/>
+              </a:ext>
+            </a:extLst>
+          </p:cNvPr>
+          <p:cNvSpPr>
+            <a:spLocks noGrp="1"/>
+          </p:cNvSpPr>
+          <p:nvPr>
+            <p:ph type="sldNum" sz="quarter" idx="12"/>
+          </p:nvPr>
+        </p:nvSpPr>
+        <p:spPr/>
+        <p:txBody>
+          <a:bodyPr/>
+          <a:lstStyle/>
+          <a:p>
+            <a:fld id="{4AD52DFA-09F4-4FAF-913E-A5D4A31DEA7F}" type="slidenum">
+              <a:rPr lang="ru-RU" smtClean="0"/>
+              <a:t>2</a:t>
+            </a:fld>
+            <a:endParaRPr lang="ru-RU"/>
+          </a:p>
+        </p:txBody>
+      </p:sp>
+    </p:spTree>
+    <p:extLst>
+      <p:ext uri="{BB962C8B-B14F-4D97-AF65-F5344CB8AC3E}">
+        <p14:creationId xmlns:p14="http://schemas.microsoft.com/office/powerpoint/2010/main" val="2559846859"/>
+      </p:ext>
+    </p:extLst>
+  </p:cSld>
+  <p:clrMapOvr>
+    <a:masterClrMapping/>
+  </p:clrMapOvr>
+</p:sld>
+</file>
+
+<file path=ppt/slides/slide20.xml><?xml version="1.0" encoding="utf-8"?>
+<p:sld xmlns:a="http://schemas.openxmlformats.org/drawingml/2006/main" xmlns:r="http://schemas.openxmlformats.org/officeDocument/2006/relationships" xmlns:p="http://schemas.openxmlformats.org/presentationml/2006/main">
+  <p:cSld>
+    <p:spTree>
+      <p:nvGrpSpPr>
+        <p:cNvPr id="1" name=""/>
+        <p:cNvGrpSpPr/>
+        <p:nvPr/>
+      </p:nvGrpSpPr>
+      <p:grpSpPr>
+        <a:xfrm>
+          <a:off x="0" y="0"/>
+          <a:ext cx="0" cy="0"/>
+          <a:chOff x="0" y="0"/>
+          <a:chExt cx="0" cy="0"/>
+        </a:xfrm>
+      </p:grpSpPr>
+      <p:sp>
+        <p:nvSpPr>
           <p:cNvPr id="6" name="Заголовок 5"/>
           <p:cNvSpPr>
             <a:spLocks noGrp="1"/>
@@ -5066,7 +7937,7 @@
           <a:p>
             <a:fld id="{68327A13-2E2F-4F2E-8A82-1D293133525B}" type="slidenum">
               <a:rPr lang="ru-RU" smtClean="0"/>
-              <a:t>17</a:t>
+              <a:t>20</a:t>
             </a:fld>
             <a:endParaRPr lang="ru-RU"/>
           </a:p>
@@ -5115,7 +7986,7 @@
 </p:sld>
 </file>
 
-<file path=ppt/slides/slide18.xml><?xml version="1.0" encoding="utf-8"?>
+<file path=ppt/slides/slide21.xml><?xml version="1.0" encoding="utf-8"?>
 <p:sld xmlns:a="http://schemas.openxmlformats.org/drawingml/2006/main" xmlns:r="http://schemas.openxmlformats.org/officeDocument/2006/relationships" xmlns:p="http://schemas.openxmlformats.org/presentationml/2006/main">
   <p:cSld>
     <p:spTree>
@@ -5183,7 +8054,7 @@
           <a:p>
             <a:fld id="{68327A13-2E2F-4F2E-8A82-1D293133525B}" type="slidenum">
               <a:rPr lang="ru-RU" smtClean="0"/>
-              <a:t>18</a:t>
+              <a:t>21</a:t>
             </a:fld>
             <a:endParaRPr lang="ru-RU"/>
           </a:p>
@@ -5275,1003 +8146,6 @@
     <p:extLst>
       <p:ext uri="{BB962C8B-B14F-4D97-AF65-F5344CB8AC3E}">
         <p14:creationId xmlns:p14="http://schemas.microsoft.com/office/powerpoint/2010/main" val="3907512276"/>
-      </p:ext>
-    </p:extLst>
-  </p:cSld>
-  <p:clrMapOvr>
-    <a:masterClrMapping/>
-  </p:clrMapOvr>
-</p:sld>
-</file>
-
-<file path=ppt/slides/slide2.xml><?xml version="1.0" encoding="utf-8"?>
-<p:sld xmlns:a="http://schemas.openxmlformats.org/drawingml/2006/main" xmlns:r="http://schemas.openxmlformats.org/officeDocument/2006/relationships" xmlns:p="http://schemas.openxmlformats.org/presentationml/2006/main">
-  <p:cSld>
-    <p:spTree>
-      <p:nvGrpSpPr>
-        <p:cNvPr id="1" name=""/>
-        <p:cNvGrpSpPr/>
-        <p:nvPr/>
-      </p:nvGrpSpPr>
-      <p:grpSpPr>
-        <a:xfrm>
-          <a:off x="0" y="0"/>
-          <a:ext cx="0" cy="0"/>
-          <a:chOff x="0" y="0"/>
-          <a:chExt cx="0" cy="0"/>
-        </a:xfrm>
-      </p:grpSpPr>
-      <p:sp>
-        <p:nvSpPr>
-          <p:cNvPr id="2" name="Title 1">
-            <a:extLst>
-              <a:ext uri="{FF2B5EF4-FFF2-40B4-BE49-F238E27FC236}">
-                <a16:creationId xmlns:a16="http://schemas.microsoft.com/office/drawing/2014/main" id="{A6AFEFCA-721F-5CCD-3701-CDA33EDBA940}"/>
-              </a:ext>
-            </a:extLst>
-          </p:cNvPr>
-          <p:cNvSpPr>
-            <a:spLocks noGrp="1"/>
-          </p:cNvSpPr>
-          <p:nvPr>
-            <p:ph type="title"/>
-          </p:nvPr>
-        </p:nvSpPr>
-        <p:spPr>
-          <a:xfrm>
-            <a:off x="838200" y="0"/>
-            <a:ext cx="10515600" cy="1325563"/>
-          </a:xfrm>
-        </p:spPr>
-        <p:txBody>
-          <a:bodyPr/>
-          <a:lstStyle/>
-          <a:p>
-            <a:r>
-              <a:rPr lang="ru-RU" dirty="0">
-                <a:latin typeface="Times New Roman" panose="02020603050405020304" pitchFamily="18" charset="0"/>
-                <a:cs typeface="Times New Roman" panose="02020603050405020304" pitchFamily="18" charset="0"/>
-              </a:rPr>
-              <a:t>Оглавление</a:t>
-            </a:r>
-          </a:p>
-        </p:txBody>
-      </p:sp>
-      <p:graphicFrame>
-        <p:nvGraphicFramePr>
-          <p:cNvPr id="5" name="Content Placeholder 4">
-            <a:extLst>
-              <a:ext uri="{FF2B5EF4-FFF2-40B4-BE49-F238E27FC236}">
-                <a16:creationId xmlns:a16="http://schemas.microsoft.com/office/drawing/2014/main" id="{134175C9-EA50-F874-3BAB-64A97D1D1BB5}"/>
-              </a:ext>
-            </a:extLst>
-          </p:cNvPr>
-          <p:cNvGraphicFramePr>
-            <a:graphicFrameLocks noGrp="1"/>
-          </p:cNvGraphicFramePr>
-          <p:nvPr>
-            <p:ph idx="1"/>
-            <p:extLst>
-              <p:ext uri="{D42A27DB-BD31-4B8C-83A1-F6EECF244321}">
-                <p14:modId xmlns:p14="http://schemas.microsoft.com/office/powerpoint/2010/main" val="138371085"/>
-              </p:ext>
-            </p:extLst>
-          </p:nvPr>
-        </p:nvGraphicFramePr>
-        <p:xfrm>
-          <a:off x="838200" y="953450"/>
-          <a:ext cx="9966158" cy="5468372"/>
-        </p:xfrm>
-        <a:graphic>
-          <a:graphicData uri="http://schemas.openxmlformats.org/drawingml/2006/table">
-            <a:tbl>
-              <a:tblPr firstRow="1" bandRow="1">
-                <a:tableStyleId>{5C22544A-7EE6-4342-B048-85BDC9FD1C3A}</a:tableStyleId>
-              </a:tblPr>
-              <a:tblGrid>
-                <a:gridCol w="8412802">
-                  <a:extLst>
-                    <a:ext uri="{9D8B030D-6E8A-4147-A177-3AD203B41FA5}">
-                      <a16:colId xmlns:a16="http://schemas.microsoft.com/office/drawing/2014/main" val="141542384"/>
-                    </a:ext>
-                  </a:extLst>
-                </a:gridCol>
-                <a:gridCol w="1553356">
-                  <a:extLst>
-                    <a:ext uri="{9D8B030D-6E8A-4147-A177-3AD203B41FA5}">
-                      <a16:colId xmlns:a16="http://schemas.microsoft.com/office/drawing/2014/main" val="2830357005"/>
-                    </a:ext>
-                  </a:extLst>
-                </a:gridCol>
-              </a:tblGrid>
-              <a:tr h="382487">
-                <a:tc>
-                  <a:txBody>
-                    <a:bodyPr/>
-                    <a:lstStyle/>
-                    <a:p>
-                      <a:pPr algn="ctr"/>
-                      <a:r>
-                        <a:rPr lang="ru-RU" dirty="0">
-                          <a:latin typeface="Times New Roman" panose="02020603050405020304" pitchFamily="18" charset="0"/>
-                          <a:cs typeface="Times New Roman" panose="02020603050405020304" pitchFamily="18" charset="0"/>
-                        </a:rPr>
-                        <a:t>Название слайда</a:t>
-                      </a:r>
-                    </a:p>
-                  </a:txBody>
-                  <a:tcPr/>
-                </a:tc>
-                <a:tc>
-                  <a:txBody>
-                    <a:bodyPr/>
-                    <a:lstStyle/>
-                    <a:p>
-                      <a:pPr algn="ctr"/>
-                      <a:r>
-                        <a:rPr lang="ru-RU" dirty="0">
-                          <a:latin typeface="Times New Roman" panose="02020603050405020304" pitchFamily="18" charset="0"/>
-                          <a:cs typeface="Times New Roman" panose="02020603050405020304" pitchFamily="18" charset="0"/>
-                        </a:rPr>
-                        <a:t>Слайд</a:t>
-                      </a:r>
-                    </a:p>
-                  </a:txBody>
-                  <a:tcPr/>
-                </a:tc>
-                <a:extLst>
-                  <a:ext uri="{0D108BD9-81ED-4DB2-BD59-A6C34878D82A}">
-                    <a16:rowId xmlns:a16="http://schemas.microsoft.com/office/drawing/2014/main" val="3788713436"/>
-                  </a:ext>
-                </a:extLst>
-              </a:tr>
-              <a:tr h="288590">
-                <a:tc>
-                  <a:txBody>
-                    <a:bodyPr/>
-                    <a:lstStyle/>
-                    <a:p>
-                      <a:pPr marL="0" algn="ctr" defTabSz="914400" rtl="0" eaLnBrk="1" latinLnBrk="0" hangingPunct="1"/>
-                      <a:r>
-                        <a:rPr lang="ru-RU" sz="1400" kern="1200" dirty="0">
-                          <a:solidFill>
-                            <a:schemeClr val="dk1"/>
-                          </a:solidFill>
-                          <a:latin typeface="+mn-lt"/>
-                          <a:ea typeface="+mn-ea"/>
-                          <a:cs typeface="+mn-cs"/>
-                        </a:rPr>
-                        <a:t>Информация об инструменте</a:t>
-                      </a:r>
-                    </a:p>
-                  </a:txBody>
-                  <a:tcPr/>
-                </a:tc>
-                <a:tc>
-                  <a:txBody>
-                    <a:bodyPr/>
-                    <a:lstStyle/>
-                    <a:p>
-                      <a:pPr marL="0" algn="ctr" defTabSz="914400" rtl="0" eaLnBrk="1" latinLnBrk="0" hangingPunct="1"/>
-                      <a:r>
-                        <a:rPr lang="ru-RU" sz="1400" kern="1200" dirty="0">
-                          <a:solidFill>
-                            <a:schemeClr val="dk1"/>
-                          </a:solidFill>
-                          <a:latin typeface="Times New Roman" panose="02020603050405020304" pitchFamily="18" charset="0"/>
-                          <a:ea typeface="+mn-ea"/>
-                          <a:cs typeface="Times New Roman" panose="02020603050405020304" pitchFamily="18" charset="0"/>
-                        </a:rPr>
-                        <a:t>3</a:t>
-                      </a:r>
-                    </a:p>
-                  </a:txBody>
-                  <a:tcPr/>
-                </a:tc>
-                <a:extLst>
-                  <a:ext uri="{0D108BD9-81ED-4DB2-BD59-A6C34878D82A}">
-                    <a16:rowId xmlns:a16="http://schemas.microsoft.com/office/drawing/2014/main" val="512482158"/>
-                  </a:ext>
-                </a:extLst>
-              </a:tr>
-              <a:tr h="318739">
-                <a:tc>
-                  <a:txBody>
-                    <a:bodyPr/>
-                    <a:lstStyle/>
-                    <a:p>
-                      <a:pPr algn="ctr"/>
-                      <a:r>
-                        <a:rPr lang="ru-RU" sz="1400" dirty="0"/>
-                        <a:t>Анализируемые языки программирования</a:t>
-                      </a:r>
-                      <a:endParaRPr lang="ru-RU" sz="1400" dirty="0">
-                        <a:latin typeface="Times New Roman" panose="02020603050405020304" pitchFamily="18" charset="0"/>
-                        <a:cs typeface="Times New Roman" panose="02020603050405020304" pitchFamily="18" charset="0"/>
-                      </a:endParaRPr>
-                    </a:p>
-                  </a:txBody>
-                  <a:tcPr/>
-                </a:tc>
-                <a:tc>
-                  <a:txBody>
-                    <a:bodyPr/>
-                    <a:lstStyle/>
-                    <a:p>
-                      <a:pPr algn="ctr"/>
-                      <a:r>
-                        <a:rPr lang="ru-RU" sz="1400" dirty="0">
-                          <a:latin typeface="Times New Roman" panose="02020603050405020304" pitchFamily="18" charset="0"/>
-                          <a:cs typeface="Times New Roman" panose="02020603050405020304" pitchFamily="18" charset="0"/>
-                        </a:rPr>
-                        <a:t>4</a:t>
-                      </a:r>
-                    </a:p>
-                  </a:txBody>
-                  <a:tcPr/>
-                </a:tc>
-                <a:extLst>
-                  <a:ext uri="{0D108BD9-81ED-4DB2-BD59-A6C34878D82A}">
-                    <a16:rowId xmlns:a16="http://schemas.microsoft.com/office/drawing/2014/main" val="636047608"/>
-                  </a:ext>
-                </a:extLst>
-              </a:tr>
-              <a:tr h="318739">
-                <a:tc>
-                  <a:txBody>
-                    <a:bodyPr/>
-                    <a:lstStyle/>
-                    <a:p>
-                      <a:pPr algn="ctr"/>
-                      <a:r>
-                        <a:rPr lang="ru-RU" sz="1400" dirty="0"/>
-                        <a:t>Начало статического анализа кода</a:t>
-                      </a:r>
-                      <a:endParaRPr lang="ru-RU" sz="1400" dirty="0">
-                        <a:latin typeface="Times New Roman" panose="02020603050405020304" pitchFamily="18" charset="0"/>
-                        <a:cs typeface="Times New Roman" panose="02020603050405020304" pitchFamily="18" charset="0"/>
-                      </a:endParaRPr>
-                    </a:p>
-                  </a:txBody>
-                  <a:tcPr/>
-                </a:tc>
-                <a:tc>
-                  <a:txBody>
-                    <a:bodyPr/>
-                    <a:lstStyle/>
-                    <a:p>
-                      <a:pPr algn="ctr"/>
-                      <a:r>
-                        <a:rPr lang="ru-RU" sz="1400" dirty="0">
-                          <a:latin typeface="Times New Roman" panose="02020603050405020304" pitchFamily="18" charset="0"/>
-                          <a:cs typeface="Times New Roman" panose="02020603050405020304" pitchFamily="18" charset="0"/>
-                        </a:rPr>
-                        <a:t>5</a:t>
-                      </a:r>
-                    </a:p>
-                  </a:txBody>
-                  <a:tcPr/>
-                </a:tc>
-                <a:extLst>
-                  <a:ext uri="{0D108BD9-81ED-4DB2-BD59-A6C34878D82A}">
-                    <a16:rowId xmlns:a16="http://schemas.microsoft.com/office/drawing/2014/main" val="2781002657"/>
-                  </a:ext>
-                </a:extLst>
-              </a:tr>
-              <a:tr h="318739">
-                <a:tc>
-                  <a:txBody>
-                    <a:bodyPr/>
-                    <a:lstStyle/>
-                    <a:p>
-                      <a:pPr algn="ctr"/>
-                      <a:r>
-                        <a:rPr lang="ru-RU" sz="1400" dirty="0"/>
-                        <a:t>Уведомление о начале работы</a:t>
-                      </a:r>
-                      <a:endParaRPr lang="ru-RU" sz="1400" dirty="0">
-                        <a:latin typeface="Times New Roman" panose="02020603050405020304" pitchFamily="18" charset="0"/>
-                        <a:cs typeface="Times New Roman" panose="02020603050405020304" pitchFamily="18" charset="0"/>
-                      </a:endParaRPr>
-                    </a:p>
-                  </a:txBody>
-                  <a:tcPr/>
-                </a:tc>
-                <a:tc>
-                  <a:txBody>
-                    <a:bodyPr/>
-                    <a:lstStyle/>
-                    <a:p>
-                      <a:pPr algn="ctr"/>
-                      <a:r>
-                        <a:rPr lang="ru-RU" sz="1400" dirty="0">
-                          <a:latin typeface="Times New Roman" panose="02020603050405020304" pitchFamily="18" charset="0"/>
-                          <a:cs typeface="Times New Roman" panose="02020603050405020304" pitchFamily="18" charset="0"/>
-                        </a:rPr>
-                        <a:t>6</a:t>
-                      </a:r>
-                    </a:p>
-                  </a:txBody>
-                  <a:tcPr/>
-                </a:tc>
-                <a:extLst>
-                  <a:ext uri="{0D108BD9-81ED-4DB2-BD59-A6C34878D82A}">
-                    <a16:rowId xmlns:a16="http://schemas.microsoft.com/office/drawing/2014/main" val="282443300"/>
-                  </a:ext>
-                </a:extLst>
-              </a:tr>
-              <a:tr h="318739">
-                <a:tc>
-                  <a:txBody>
-                    <a:bodyPr/>
-                    <a:lstStyle/>
-                    <a:p>
-                      <a:pPr algn="ctr"/>
-                      <a:r>
-                        <a:rPr lang="ru-RU" sz="1400" dirty="0"/>
-                        <a:t>Уведомление об успешной проверке</a:t>
-                      </a:r>
-                      <a:endParaRPr lang="ru-RU" sz="1400" dirty="0">
-                        <a:latin typeface="Times New Roman" panose="02020603050405020304" pitchFamily="18" charset="0"/>
-                        <a:cs typeface="Times New Roman" panose="02020603050405020304" pitchFamily="18" charset="0"/>
-                      </a:endParaRPr>
-                    </a:p>
-                  </a:txBody>
-                  <a:tcPr/>
-                </a:tc>
-                <a:tc>
-                  <a:txBody>
-                    <a:bodyPr/>
-                    <a:lstStyle/>
-                    <a:p>
-                      <a:pPr algn="ctr"/>
-                      <a:r>
-                        <a:rPr lang="ru-RU" sz="1400" dirty="0">
-                          <a:latin typeface="Times New Roman" panose="02020603050405020304" pitchFamily="18" charset="0"/>
-                          <a:cs typeface="Times New Roman" panose="02020603050405020304" pitchFamily="18" charset="0"/>
-                        </a:rPr>
-                        <a:t>7</a:t>
-                      </a:r>
-                    </a:p>
-                  </a:txBody>
-                  <a:tcPr/>
-                </a:tc>
-                <a:extLst>
-                  <a:ext uri="{0D108BD9-81ED-4DB2-BD59-A6C34878D82A}">
-                    <a16:rowId xmlns:a16="http://schemas.microsoft.com/office/drawing/2014/main" val="2623708350"/>
-                  </a:ext>
-                </a:extLst>
-              </a:tr>
-              <a:tr h="318739">
-                <a:tc>
-                  <a:txBody>
-                    <a:bodyPr/>
-                    <a:lstStyle/>
-                    <a:p>
-                      <a:pPr algn="ctr"/>
-                      <a:r>
-                        <a:rPr lang="ru-RU" sz="1400" dirty="0"/>
-                        <a:t>Первая критическая ошибка (</a:t>
-                      </a:r>
-                      <a:r>
-                        <a:rPr lang="ru-RU" altLang="ru-RU" sz="1400" i="1" dirty="0" err="1"/>
-                        <a:t>shared_ptr</a:t>
-                      </a:r>
-                      <a:r>
-                        <a:rPr lang="ru-RU" altLang="ru-RU" sz="1400" i="1" dirty="0"/>
-                        <a:t> </a:t>
-                      </a:r>
-                      <a:r>
-                        <a:rPr lang="ru-RU" altLang="ru-RU" sz="1400" dirty="0"/>
-                        <a:t>между </a:t>
-                      </a:r>
-                      <a:r>
-                        <a:rPr lang="ru-RU" altLang="ru-RU" sz="1400" i="1" dirty="0" err="1"/>
-                        <a:t>Actor</a:t>
-                      </a:r>
-                      <a:r>
-                        <a:rPr lang="ru-RU" altLang="ru-RU" sz="1400" dirty="0"/>
-                        <a:t> и </a:t>
-                      </a:r>
-                      <a:r>
-                        <a:rPr lang="ru-RU" altLang="ru-RU" sz="1400" i="1" dirty="0"/>
-                        <a:t>Movie</a:t>
-                      </a:r>
-                      <a:r>
-                        <a:rPr lang="ru-RU" altLang="ru-RU" sz="1400" dirty="0"/>
-                        <a:t>)</a:t>
-                      </a:r>
-                      <a:endParaRPr lang="ru-RU" sz="1400" dirty="0">
-                        <a:latin typeface="Times New Roman" panose="02020603050405020304" pitchFamily="18" charset="0"/>
-                        <a:cs typeface="Times New Roman" panose="02020603050405020304" pitchFamily="18" charset="0"/>
-                      </a:endParaRPr>
-                    </a:p>
-                  </a:txBody>
-                  <a:tcPr/>
-                </a:tc>
-                <a:tc>
-                  <a:txBody>
-                    <a:bodyPr/>
-                    <a:lstStyle/>
-                    <a:p>
-                      <a:pPr algn="ctr"/>
-                      <a:r>
-                        <a:rPr lang="ru-RU" sz="1400" dirty="0">
-                          <a:latin typeface="Times New Roman" panose="02020603050405020304" pitchFamily="18" charset="0"/>
-                          <a:cs typeface="Times New Roman" panose="02020603050405020304" pitchFamily="18" charset="0"/>
-                        </a:rPr>
-                        <a:t>8</a:t>
-                      </a:r>
-                    </a:p>
-                  </a:txBody>
-                  <a:tcPr/>
-                </a:tc>
-                <a:extLst>
-                  <a:ext uri="{0D108BD9-81ED-4DB2-BD59-A6C34878D82A}">
-                    <a16:rowId xmlns:a16="http://schemas.microsoft.com/office/drawing/2014/main" val="2857371628"/>
-                  </a:ext>
-                </a:extLst>
-              </a:tr>
-              <a:tr h="318739">
-                <a:tc>
-                  <a:txBody>
-                    <a:bodyPr/>
-                    <a:lstStyle/>
-                    <a:p>
-                      <a:pPr algn="ctr"/>
-                      <a:r>
-                        <a:rPr lang="ru-RU" sz="1400" dirty="0"/>
-                        <a:t>Вторая критическая ошибка(бесконечный цикл у </a:t>
-                      </a:r>
-                      <a:r>
-                        <a:rPr lang="en-US" sz="1400" i="1" dirty="0" err="1"/>
-                        <a:t>add_geners</a:t>
-                      </a:r>
-                      <a:r>
-                        <a:rPr lang="en-US" sz="1400" i="1" dirty="0"/>
-                        <a:t> </a:t>
-                      </a:r>
-                      <a:r>
-                        <a:rPr lang="ru-RU" sz="1400" dirty="0"/>
-                        <a:t>и </a:t>
-                      </a:r>
-                      <a:r>
-                        <a:rPr lang="en-US" sz="1400" i="1" dirty="0" err="1"/>
-                        <a:t>add_actors</a:t>
-                      </a:r>
-                      <a:r>
-                        <a:rPr lang="en-US" sz="1400" dirty="0"/>
-                        <a:t>)</a:t>
-                      </a:r>
-                      <a:endParaRPr lang="ru-RU" sz="1400" dirty="0">
-                        <a:latin typeface="Times New Roman" panose="02020603050405020304" pitchFamily="18" charset="0"/>
-                        <a:cs typeface="Times New Roman" panose="02020603050405020304" pitchFamily="18" charset="0"/>
-                      </a:endParaRPr>
-                    </a:p>
-                  </a:txBody>
-                  <a:tcPr/>
-                </a:tc>
-                <a:tc>
-                  <a:txBody>
-                    <a:bodyPr/>
-                    <a:lstStyle/>
-                    <a:p>
-                      <a:pPr algn="ctr"/>
-                      <a:r>
-                        <a:rPr lang="ru-RU" sz="1400" dirty="0">
-                          <a:latin typeface="Times New Roman" panose="02020603050405020304" pitchFamily="18" charset="0"/>
-                          <a:cs typeface="Times New Roman" panose="02020603050405020304" pitchFamily="18" charset="0"/>
-                        </a:rPr>
-                        <a:t>9</a:t>
-                      </a:r>
-                    </a:p>
-                  </a:txBody>
-                  <a:tcPr/>
-                </a:tc>
-                <a:extLst>
-                  <a:ext uri="{0D108BD9-81ED-4DB2-BD59-A6C34878D82A}">
-                    <a16:rowId xmlns:a16="http://schemas.microsoft.com/office/drawing/2014/main" val="4261147790"/>
-                  </a:ext>
-                </a:extLst>
-              </a:tr>
-              <a:tr h="318739">
-                <a:tc>
-                  <a:txBody>
-                    <a:bodyPr/>
-                    <a:lstStyle/>
-                    <a:p>
-                      <a:pPr algn="ctr"/>
-                      <a:r>
-                        <a:rPr lang="ru-RU" sz="1400" dirty="0"/>
-                        <a:t>Третья критическая ошибка (Хранение </a:t>
-                      </a:r>
-                      <a:r>
-                        <a:rPr lang="ru-RU" sz="1400" i="1" dirty="0"/>
-                        <a:t>Movie* </a:t>
-                      </a:r>
-                      <a:r>
-                        <a:rPr lang="ru-RU" sz="1400" dirty="0"/>
-                        <a:t>вместо </a:t>
-                      </a:r>
-                      <a:r>
-                        <a:rPr lang="ru-RU" sz="1400" i="1" dirty="0" err="1"/>
-                        <a:t>weak_ptr</a:t>
-                      </a:r>
-                      <a:r>
-                        <a:rPr lang="ru-RU" sz="1400" i="1" dirty="0"/>
-                        <a:t>&lt;Movie&gt;</a:t>
-                      </a:r>
-                      <a:r>
-                        <a:rPr lang="ru-RU" sz="1400" dirty="0"/>
-                        <a:t>)</a:t>
-                      </a:r>
-                      <a:endParaRPr lang="ru-RU" sz="1400" dirty="0">
-                        <a:latin typeface="Times New Roman" panose="02020603050405020304" pitchFamily="18" charset="0"/>
-                        <a:cs typeface="Times New Roman" panose="02020603050405020304" pitchFamily="18" charset="0"/>
-                      </a:endParaRPr>
-                    </a:p>
-                  </a:txBody>
-                  <a:tcPr/>
-                </a:tc>
-                <a:tc>
-                  <a:txBody>
-                    <a:bodyPr/>
-                    <a:lstStyle/>
-                    <a:p>
-                      <a:pPr algn="ctr"/>
-                      <a:r>
-                        <a:rPr lang="ru-RU" sz="1400" dirty="0">
-                          <a:latin typeface="Times New Roman" panose="02020603050405020304" pitchFamily="18" charset="0"/>
-                          <a:cs typeface="Times New Roman" panose="02020603050405020304" pitchFamily="18" charset="0"/>
-                        </a:rPr>
-                        <a:t>10</a:t>
-                      </a:r>
-                    </a:p>
-                  </a:txBody>
-                  <a:tcPr/>
-                </a:tc>
-                <a:extLst>
-                  <a:ext uri="{0D108BD9-81ED-4DB2-BD59-A6C34878D82A}">
-                    <a16:rowId xmlns:a16="http://schemas.microsoft.com/office/drawing/2014/main" val="1696005487"/>
-                  </a:ext>
-                </a:extLst>
-              </a:tr>
-              <a:tr h="318739">
-                <a:tc>
-                  <a:txBody>
-                    <a:bodyPr/>
-                    <a:lstStyle/>
-                    <a:p>
-                      <a:pPr algn="ctr"/>
-                      <a:r>
-                        <a:rPr lang="ru-RU" sz="1400" dirty="0"/>
-                        <a:t>Четвертая критическая ошибка(не неинициализированная переменная в </a:t>
-                      </a:r>
-                      <a:r>
-                        <a:rPr lang="en-US" sz="1400" i="1" dirty="0"/>
-                        <a:t>order</a:t>
-                      </a:r>
-                      <a:r>
-                        <a:rPr lang="en-US" sz="1400" dirty="0"/>
-                        <a:t>)</a:t>
-                      </a:r>
-                      <a:endParaRPr lang="ru-RU" sz="1400" dirty="0">
-                        <a:latin typeface="Times New Roman" panose="02020603050405020304" pitchFamily="18" charset="0"/>
-                        <a:cs typeface="Times New Roman" panose="02020603050405020304" pitchFamily="18" charset="0"/>
-                      </a:endParaRPr>
-                    </a:p>
-                  </a:txBody>
-                  <a:tcPr/>
-                </a:tc>
-                <a:tc>
-                  <a:txBody>
-                    <a:bodyPr/>
-                    <a:lstStyle/>
-                    <a:p>
-                      <a:pPr algn="ctr"/>
-                      <a:r>
-                        <a:rPr lang="ru-RU" sz="1400" dirty="0">
-                          <a:latin typeface="Times New Roman" panose="02020603050405020304" pitchFamily="18" charset="0"/>
-                          <a:cs typeface="Times New Roman" panose="02020603050405020304" pitchFamily="18" charset="0"/>
-                        </a:rPr>
-                        <a:t>11</a:t>
-                      </a:r>
-                    </a:p>
-                  </a:txBody>
-                  <a:tcPr/>
-                </a:tc>
-                <a:extLst>
-                  <a:ext uri="{0D108BD9-81ED-4DB2-BD59-A6C34878D82A}">
-                    <a16:rowId xmlns:a16="http://schemas.microsoft.com/office/drawing/2014/main" val="428513589"/>
-                  </a:ext>
-                </a:extLst>
-              </a:tr>
-              <a:tr h="318739">
-                <a:tc>
-                  <a:txBody>
-                    <a:bodyPr/>
-                    <a:lstStyle/>
-                    <a:p>
-                      <a:pPr algn="ctr"/>
-                      <a:r>
-                        <a:rPr lang="ru-RU" sz="1400" dirty="0"/>
-                        <a:t>Пятая критическая ошибка</a:t>
-                      </a:r>
-                      <a:r>
-                        <a:rPr lang="en-US" sz="1400" dirty="0"/>
-                        <a:t> (</a:t>
-                      </a:r>
-                      <a:r>
-                        <a:rPr lang="ru-RU" sz="1400" dirty="0"/>
-                        <a:t>нулевой указатель)</a:t>
-                      </a:r>
-                      <a:endParaRPr lang="ru-RU" sz="1400" dirty="0">
-                        <a:latin typeface="Times New Roman" panose="02020603050405020304" pitchFamily="18" charset="0"/>
-                        <a:cs typeface="Times New Roman" panose="02020603050405020304" pitchFamily="18" charset="0"/>
-                      </a:endParaRPr>
-                    </a:p>
-                  </a:txBody>
-                  <a:tcPr/>
-                </a:tc>
-                <a:tc>
-                  <a:txBody>
-                    <a:bodyPr/>
-                    <a:lstStyle/>
-                    <a:p>
-                      <a:pPr algn="ctr"/>
-                      <a:r>
-                        <a:rPr lang="ru-RU" sz="1400" dirty="0">
-                          <a:latin typeface="Times New Roman" panose="02020603050405020304" pitchFamily="18" charset="0"/>
-                          <a:cs typeface="Times New Roman" panose="02020603050405020304" pitchFamily="18" charset="0"/>
-                        </a:rPr>
-                        <a:t>12</a:t>
-                      </a:r>
-                    </a:p>
-                  </a:txBody>
-                  <a:tcPr/>
-                </a:tc>
-                <a:extLst>
-                  <a:ext uri="{0D108BD9-81ED-4DB2-BD59-A6C34878D82A}">
-                    <a16:rowId xmlns:a16="http://schemas.microsoft.com/office/drawing/2014/main" val="3901408089"/>
-                  </a:ext>
-                </a:extLst>
-              </a:tr>
-              <a:tr h="318739">
-                <a:tc>
-                  <a:txBody>
-                    <a:bodyPr/>
-                    <a:lstStyle/>
-                    <a:p>
-                      <a:pPr algn="ctr"/>
-                      <a:r>
-                        <a:rPr lang="ru-RU" sz="1400" dirty="0"/>
-                        <a:t>Шестая критическая ошибка(циклическая зависимость у </a:t>
-                      </a:r>
-                      <a:r>
-                        <a:rPr lang="ru-RU" sz="1400" i="1" dirty="0" err="1"/>
-                        <a:t>Movie.h</a:t>
-                      </a:r>
-                      <a:r>
-                        <a:rPr lang="ru-RU" sz="1400" dirty="0"/>
-                        <a:t>)</a:t>
-                      </a:r>
-                      <a:endParaRPr lang="ru-RU" sz="1400" i="1" dirty="0">
-                        <a:latin typeface="Times New Roman" panose="02020603050405020304" pitchFamily="18" charset="0"/>
-                        <a:cs typeface="Times New Roman" panose="02020603050405020304" pitchFamily="18" charset="0"/>
-                      </a:endParaRPr>
-                    </a:p>
-                  </a:txBody>
-                  <a:tcPr/>
-                </a:tc>
-                <a:tc>
-                  <a:txBody>
-                    <a:bodyPr/>
-                    <a:lstStyle/>
-                    <a:p>
-                      <a:pPr algn="ctr"/>
-                      <a:r>
-                        <a:rPr lang="ru-RU" sz="1400" dirty="0">
-                          <a:latin typeface="Times New Roman" panose="02020603050405020304" pitchFamily="18" charset="0"/>
-                          <a:cs typeface="Times New Roman" panose="02020603050405020304" pitchFamily="18" charset="0"/>
-                        </a:rPr>
-                        <a:t>13</a:t>
-                      </a:r>
-                    </a:p>
-                  </a:txBody>
-                  <a:tcPr/>
-                </a:tc>
-                <a:extLst>
-                  <a:ext uri="{0D108BD9-81ED-4DB2-BD59-A6C34878D82A}">
-                    <a16:rowId xmlns:a16="http://schemas.microsoft.com/office/drawing/2014/main" val="2071910897"/>
-                  </a:ext>
-                </a:extLst>
-              </a:tr>
-              <a:tr h="318739">
-                <a:tc>
-                  <a:txBody>
-                    <a:bodyPr/>
-                    <a:lstStyle/>
-                    <a:p>
-                      <a:pPr algn="ctr"/>
-                      <a:r>
-                        <a:rPr lang="ru-RU" sz="1400" dirty="0"/>
-                        <a:t>Первая НЕ критическая ошибка(не инициализирован </a:t>
-                      </a:r>
-                      <a:r>
-                        <a:rPr lang="ru-RU" sz="1400" i="1" dirty="0" err="1"/>
-                        <a:t>std</a:t>
-                      </a:r>
-                      <a:r>
-                        <a:rPr lang="ru-RU" sz="1400" i="1" dirty="0"/>
-                        <a:t>::</a:t>
-                      </a:r>
-                      <a:r>
-                        <a:rPr lang="ru-RU" sz="1400" i="1" dirty="0" err="1"/>
-                        <a:t>shared_ptr</a:t>
-                      </a:r>
-                      <a:r>
-                        <a:rPr lang="ru-RU" sz="1400" i="1" dirty="0"/>
-                        <a:t>&lt;Movie&gt; </a:t>
-                      </a:r>
-                      <a:r>
-                        <a:rPr lang="ru-RU" sz="1400" i="1" dirty="0" err="1"/>
-                        <a:t>movie</a:t>
-                      </a:r>
-                      <a:r>
-                        <a:rPr lang="ru-RU" sz="1400" dirty="0"/>
-                        <a:t>)</a:t>
-                      </a:r>
-                      <a:endParaRPr lang="ru-RU" sz="1400" dirty="0">
-                        <a:latin typeface="Times New Roman" panose="02020603050405020304" pitchFamily="18" charset="0"/>
-                        <a:cs typeface="Times New Roman" panose="02020603050405020304" pitchFamily="18" charset="0"/>
-                      </a:endParaRPr>
-                    </a:p>
-                  </a:txBody>
-                  <a:tcPr/>
-                </a:tc>
-                <a:tc>
-                  <a:txBody>
-                    <a:bodyPr/>
-                    <a:lstStyle/>
-                    <a:p>
-                      <a:pPr algn="ctr"/>
-                      <a:r>
-                        <a:rPr lang="ru-RU" sz="1400" dirty="0">
-                          <a:latin typeface="Times New Roman" panose="02020603050405020304" pitchFamily="18" charset="0"/>
-                          <a:cs typeface="Times New Roman" panose="02020603050405020304" pitchFamily="18" charset="0"/>
-                        </a:rPr>
-                        <a:t>14</a:t>
-                      </a:r>
-                    </a:p>
-                  </a:txBody>
-                  <a:tcPr/>
-                </a:tc>
-                <a:extLst>
-                  <a:ext uri="{0D108BD9-81ED-4DB2-BD59-A6C34878D82A}">
-                    <a16:rowId xmlns:a16="http://schemas.microsoft.com/office/drawing/2014/main" val="1797833900"/>
-                  </a:ext>
-                </a:extLst>
-              </a:tr>
-              <a:tr h="318739">
-                <a:tc>
-                  <a:txBody>
-                    <a:bodyPr/>
-                    <a:lstStyle/>
-                    <a:p>
-                      <a:pPr algn="ctr"/>
-                      <a:r>
-                        <a:rPr lang="ru-RU" sz="1400" dirty="0"/>
-                        <a:t>Вторая НЕ критическая ошибка (добавление актеров, вместо </a:t>
-                      </a:r>
-                      <a:r>
-                        <a:rPr lang="ru-RU" sz="1400" dirty="0" err="1"/>
-                        <a:t>режисеров</a:t>
-                      </a:r>
-                      <a:r>
-                        <a:rPr lang="ru-RU" sz="1400" dirty="0"/>
-                        <a:t>)</a:t>
-                      </a:r>
-                      <a:endParaRPr lang="ru-RU" sz="1400" dirty="0">
-                        <a:latin typeface="Times New Roman" panose="02020603050405020304" pitchFamily="18" charset="0"/>
-                        <a:cs typeface="Times New Roman" panose="02020603050405020304" pitchFamily="18" charset="0"/>
-                      </a:endParaRPr>
-                    </a:p>
-                  </a:txBody>
-                  <a:tcPr/>
-                </a:tc>
-                <a:tc>
-                  <a:txBody>
-                    <a:bodyPr/>
-                    <a:lstStyle/>
-                    <a:p>
-                      <a:pPr algn="ctr"/>
-                      <a:r>
-                        <a:rPr lang="ru-RU" sz="1400" dirty="0">
-                          <a:latin typeface="Times New Roman" panose="02020603050405020304" pitchFamily="18" charset="0"/>
-                          <a:cs typeface="Times New Roman" panose="02020603050405020304" pitchFamily="18" charset="0"/>
-                        </a:rPr>
-                        <a:t>15</a:t>
-                      </a:r>
-                    </a:p>
-                  </a:txBody>
-                  <a:tcPr/>
-                </a:tc>
-                <a:extLst>
-                  <a:ext uri="{0D108BD9-81ED-4DB2-BD59-A6C34878D82A}">
-                    <a16:rowId xmlns:a16="http://schemas.microsoft.com/office/drawing/2014/main" val="2102275894"/>
-                  </a:ext>
-                </a:extLst>
-              </a:tr>
-              <a:tr h="318739">
-                <a:tc>
-                  <a:txBody>
-                    <a:bodyPr/>
-                    <a:lstStyle/>
-                    <a:p>
-                      <a:pPr algn="ctr"/>
-                      <a:r>
-                        <a:rPr lang="ru-RU" sz="1400" dirty="0"/>
-                        <a:t>Еще одна критическая ошибка(</a:t>
-                      </a:r>
-                      <a:r>
-                        <a:rPr lang="ru-RU" sz="1400" dirty="0" err="1"/>
-                        <a:t>отсутсвие</a:t>
-                      </a:r>
-                      <a:r>
-                        <a:rPr lang="ru-RU" sz="1400" dirty="0"/>
-                        <a:t> указателя на константное значение)</a:t>
-                      </a:r>
-                      <a:endParaRPr lang="ru-RU" sz="1400" dirty="0">
-                        <a:latin typeface="Times New Roman" panose="02020603050405020304" pitchFamily="18" charset="0"/>
-                        <a:cs typeface="Times New Roman" panose="02020603050405020304" pitchFamily="18" charset="0"/>
-                      </a:endParaRPr>
-                    </a:p>
-                  </a:txBody>
-                  <a:tcPr/>
-                </a:tc>
-                <a:tc>
-                  <a:txBody>
-                    <a:bodyPr/>
-                    <a:lstStyle/>
-                    <a:p>
-                      <a:pPr algn="ctr"/>
-                      <a:r>
-                        <a:rPr lang="ru-RU" sz="1400" dirty="0">
-                          <a:latin typeface="Times New Roman" panose="02020603050405020304" pitchFamily="18" charset="0"/>
-                          <a:cs typeface="Times New Roman" panose="02020603050405020304" pitchFamily="18" charset="0"/>
-                        </a:rPr>
-                        <a:t>16</a:t>
-                      </a:r>
-                    </a:p>
-                  </a:txBody>
-                  <a:tcPr/>
-                </a:tc>
-                <a:extLst>
-                  <a:ext uri="{0D108BD9-81ED-4DB2-BD59-A6C34878D82A}">
-                    <a16:rowId xmlns:a16="http://schemas.microsoft.com/office/drawing/2014/main" val="542826930"/>
-                  </a:ext>
-                </a:extLst>
-              </a:tr>
-              <a:tr h="318739">
-                <a:tc>
-                  <a:txBody>
-                    <a:bodyPr/>
-                    <a:lstStyle/>
-                    <a:p>
-                      <a:pPr algn="ctr"/>
-                      <a:r>
-                        <a:rPr lang="ru-RU" sz="1400" dirty="0">
-                          <a:latin typeface="Times New Roman" panose="02020603050405020304" pitchFamily="18" charset="0"/>
-                          <a:cs typeface="Times New Roman" panose="02020603050405020304" pitchFamily="18" charset="0"/>
-                        </a:rPr>
-                        <a:t>Выводы</a:t>
-                      </a:r>
-                    </a:p>
-                  </a:txBody>
-                  <a:tcPr/>
-                </a:tc>
-                <a:tc>
-                  <a:txBody>
-                    <a:bodyPr/>
-                    <a:lstStyle/>
-                    <a:p>
-                      <a:pPr algn="ctr"/>
-                      <a:r>
-                        <a:rPr lang="ru-RU" sz="1400" dirty="0">
-                          <a:latin typeface="Times New Roman" panose="02020603050405020304" pitchFamily="18" charset="0"/>
-                          <a:cs typeface="Times New Roman" panose="02020603050405020304" pitchFamily="18" charset="0"/>
-                        </a:rPr>
-                        <a:t>17</a:t>
-                      </a:r>
-                    </a:p>
-                  </a:txBody>
-                  <a:tcPr/>
-                </a:tc>
-                <a:extLst>
-                  <a:ext uri="{0D108BD9-81ED-4DB2-BD59-A6C34878D82A}">
-                    <a16:rowId xmlns:a16="http://schemas.microsoft.com/office/drawing/2014/main" val="1947315688"/>
-                  </a:ext>
-                </a:extLst>
-              </a:tr>
-              <a:tr h="318739">
-                <a:tc>
-                  <a:txBody>
-                    <a:bodyPr/>
-                    <a:lstStyle/>
-                    <a:p>
-                      <a:pPr algn="ctr"/>
-                      <a:r>
-                        <a:rPr lang="ru-RU" sz="1400" dirty="0"/>
-                        <a:t>Список источников и пожеланий</a:t>
-                      </a:r>
-                      <a:endParaRPr lang="ru-RU" sz="1400" dirty="0">
-                        <a:latin typeface="Times New Roman" panose="02020603050405020304" pitchFamily="18" charset="0"/>
-                        <a:cs typeface="Times New Roman" panose="02020603050405020304" pitchFamily="18" charset="0"/>
-                      </a:endParaRPr>
-                    </a:p>
-                  </a:txBody>
-                  <a:tcPr/>
-                </a:tc>
-                <a:tc>
-                  <a:txBody>
-                    <a:bodyPr/>
-                    <a:lstStyle/>
-                    <a:p>
-                      <a:pPr algn="ctr"/>
-                      <a:r>
-                        <a:rPr lang="ru-RU" sz="1400" dirty="0">
-                          <a:latin typeface="Times New Roman" panose="02020603050405020304" pitchFamily="18" charset="0"/>
-                          <a:cs typeface="Times New Roman" panose="02020603050405020304" pitchFamily="18" charset="0"/>
-                        </a:rPr>
-                        <a:t>18</a:t>
-                      </a:r>
-                    </a:p>
-                  </a:txBody>
-                  <a:tcPr/>
-                </a:tc>
-                <a:extLst>
-                  <a:ext uri="{0D108BD9-81ED-4DB2-BD59-A6C34878D82A}">
-                    <a16:rowId xmlns:a16="http://schemas.microsoft.com/office/drawing/2014/main" val="51082828"/>
-                  </a:ext>
-                </a:extLst>
-              </a:tr>
-            </a:tbl>
-          </a:graphicData>
-        </a:graphic>
-      </p:graphicFrame>
-      <p:sp>
-        <p:nvSpPr>
-          <p:cNvPr id="4" name="Slide Number Placeholder 3">
-            <a:extLst>
-              <a:ext uri="{FF2B5EF4-FFF2-40B4-BE49-F238E27FC236}">
-                <a16:creationId xmlns:a16="http://schemas.microsoft.com/office/drawing/2014/main" id="{E05793A1-D632-1688-2E92-6187FC1DF401}"/>
-              </a:ext>
-            </a:extLst>
-          </p:cNvPr>
-          <p:cNvSpPr>
-            <a:spLocks noGrp="1"/>
-          </p:cNvSpPr>
-          <p:nvPr>
-            <p:ph type="sldNum" sz="quarter" idx="12"/>
-          </p:nvPr>
-        </p:nvSpPr>
-        <p:spPr/>
-        <p:txBody>
-          <a:bodyPr/>
-          <a:lstStyle/>
-          <a:p>
-            <a:fld id="{4AD52DFA-09F4-4FAF-913E-A5D4A31DEA7F}" type="slidenum">
-              <a:rPr lang="ru-RU" smtClean="0"/>
-              <a:t>2</a:t>
-            </a:fld>
-            <a:endParaRPr lang="ru-RU"/>
-          </a:p>
-        </p:txBody>
-      </p:sp>
-    </p:spTree>
-    <p:extLst>
-      <p:ext uri="{BB962C8B-B14F-4D97-AF65-F5344CB8AC3E}">
-        <p14:creationId xmlns:p14="http://schemas.microsoft.com/office/powerpoint/2010/main" val="2559846859"/>
       </p:ext>
     </p:extLst>
   </p:cSld>

--- a/Task7/Лр7_KodusAI Небоваренков Зверь.pptx
+++ b/Task7/Лр7_KodusAI Небоваренков Зверь.pptx
@@ -217,7 +217,7 @@
           <a:p>
             <a:fld id="{B1C684E2-121A-4D6B-9071-5C929EF90B75}" type="datetimeFigureOut">
               <a:rPr lang="ru-RU" smtClean="0"/>
-              <a:t>09.04.2026</a:t>
+              <a:t>16.04.2026</a:t>
             </a:fld>
             <a:endParaRPr lang="ru-RU"/>
           </a:p>
@@ -640,6 +640,90 @@
           <a:p>
             <a:fld id="{788D1AEF-DD74-4B85-93D8-3C2C0F18F670}" type="slidenum">
               <a:rPr lang="ru-RU" smtClean="0"/>
+              <a:t>17</a:t>
+            </a:fld>
+            <a:endParaRPr lang="ru-RU"/>
+          </a:p>
+        </p:txBody>
+      </p:sp>
+    </p:spTree>
+    <p:extLst>
+      <p:ext uri="{BB962C8B-B14F-4D97-AF65-F5344CB8AC3E}">
+        <p14:creationId xmlns:p14="http://schemas.microsoft.com/office/powerpoint/2010/main" val="3344848779"/>
+      </p:ext>
+    </p:extLst>
+  </p:cSld>
+  <p:clrMapOvr>
+    <a:masterClrMapping/>
+  </p:clrMapOvr>
+</p:notes>
+</file>
+
+<file path=ppt/notesSlides/notesSlide3.xml><?xml version="1.0" encoding="utf-8"?>
+<p:notes xmlns:a="http://schemas.openxmlformats.org/drawingml/2006/main" xmlns:r="http://schemas.openxmlformats.org/officeDocument/2006/relationships" xmlns:p="http://schemas.openxmlformats.org/presentationml/2006/main">
+  <p:cSld>
+    <p:spTree>
+      <p:nvGrpSpPr>
+        <p:cNvPr id="1" name=""/>
+        <p:cNvGrpSpPr/>
+        <p:nvPr/>
+      </p:nvGrpSpPr>
+      <p:grpSpPr>
+        <a:xfrm>
+          <a:off x="0" y="0"/>
+          <a:ext cx="0" cy="0"/>
+          <a:chOff x="0" y="0"/>
+          <a:chExt cx="0" cy="0"/>
+        </a:xfrm>
+      </p:grpSpPr>
+      <p:sp>
+        <p:nvSpPr>
+          <p:cNvPr id="2" name="Образ слайда 1"/>
+          <p:cNvSpPr>
+            <a:spLocks noGrp="1" noRot="1" noChangeAspect="1"/>
+          </p:cNvSpPr>
+          <p:nvPr>
+            <p:ph type="sldImg"/>
+          </p:nvPr>
+        </p:nvSpPr>
+        <p:spPr/>
+      </p:sp>
+      <p:sp>
+        <p:nvSpPr>
+          <p:cNvPr id="3" name="Заметки 2"/>
+          <p:cNvSpPr>
+            <a:spLocks noGrp="1"/>
+          </p:cNvSpPr>
+          <p:nvPr>
+            <p:ph type="body" idx="1"/>
+          </p:nvPr>
+        </p:nvSpPr>
+        <p:spPr/>
+        <p:txBody>
+          <a:bodyPr/>
+          <a:lstStyle/>
+          <a:p>
+            <a:endParaRPr lang="ru-RU" dirty="0"/>
+          </a:p>
+        </p:txBody>
+      </p:sp>
+      <p:sp>
+        <p:nvSpPr>
+          <p:cNvPr id="4" name="Номер слайда 3"/>
+          <p:cNvSpPr>
+            <a:spLocks noGrp="1"/>
+          </p:cNvSpPr>
+          <p:nvPr>
+            <p:ph type="sldNum" sz="quarter" idx="5"/>
+          </p:nvPr>
+        </p:nvSpPr>
+        <p:spPr/>
+        <p:txBody>
+          <a:bodyPr/>
+          <a:lstStyle/>
+          <a:p>
+            <a:fld id="{788D1AEF-DD74-4B85-93D8-3C2C0F18F670}" type="slidenum">
+              <a:rPr lang="ru-RU" smtClean="0"/>
               <a:t>18</a:t>
             </a:fld>
             <a:endParaRPr lang="ru-RU"/>
@@ -788,7 +872,7 @@
           <a:p>
             <a:fld id="{B9D6247F-6AF4-4318-A27B-4F8FC20FB9AC}" type="datetime1">
               <a:rPr lang="ru-RU" smtClean="0"/>
-              <a:t>09.04.2026</a:t>
+              <a:t>16.04.2026</a:t>
             </a:fld>
             <a:endParaRPr lang="ru-RU"/>
           </a:p>
@@ -956,7 +1040,7 @@
           <a:p>
             <a:fld id="{AF31D271-C6DA-48C3-BCC1-D133AD7203D4}" type="datetime1">
               <a:rPr lang="ru-RU" smtClean="0"/>
-              <a:t>09.04.2026</a:t>
+              <a:t>16.04.2026</a:t>
             </a:fld>
             <a:endParaRPr lang="ru-RU"/>
           </a:p>
@@ -1134,7 +1218,7 @@
           <a:p>
             <a:fld id="{A960878F-82B3-4277-A62B-1A7C958B7AFD}" type="datetime1">
               <a:rPr lang="ru-RU" smtClean="0"/>
-              <a:t>09.04.2026</a:t>
+              <a:t>16.04.2026</a:t>
             </a:fld>
             <a:endParaRPr lang="ru-RU"/>
           </a:p>
@@ -1302,7 +1386,7 @@
           <a:p>
             <a:fld id="{AF145611-9BEC-4F6E-A7A2-016B98ED9A5B}" type="datetime1">
               <a:rPr lang="ru-RU" smtClean="0"/>
-              <a:t>09.04.2026</a:t>
+              <a:t>16.04.2026</a:t>
             </a:fld>
             <a:endParaRPr lang="ru-RU"/>
           </a:p>
@@ -1547,7 +1631,7 @@
           <a:p>
             <a:fld id="{A2FEA4DD-3B4D-4EAE-9A17-ACA5EF5AE5AE}" type="datetime1">
               <a:rPr lang="ru-RU" smtClean="0"/>
-              <a:t>09.04.2026</a:t>
+              <a:t>16.04.2026</a:t>
             </a:fld>
             <a:endParaRPr lang="ru-RU"/>
           </a:p>
@@ -1776,7 +1860,7 @@
           <a:p>
             <a:fld id="{9264AF9E-18B6-4C53-A9EB-01F4D00D3082}" type="datetime1">
               <a:rPr lang="ru-RU" smtClean="0"/>
-              <a:t>09.04.2026</a:t>
+              <a:t>16.04.2026</a:t>
             </a:fld>
             <a:endParaRPr lang="ru-RU"/>
           </a:p>
@@ -2140,7 +2224,7 @@
           <a:p>
             <a:fld id="{8F55B0F0-0CD9-4813-B860-AB929393F0BC}" type="datetime1">
               <a:rPr lang="ru-RU" smtClean="0"/>
-              <a:t>09.04.2026</a:t>
+              <a:t>16.04.2026</a:t>
             </a:fld>
             <a:endParaRPr lang="ru-RU"/>
           </a:p>
@@ -2257,7 +2341,7 @@
           <a:p>
             <a:fld id="{8E5CD37D-B4E5-478E-B1C6-9811DB3A2BC3}" type="datetime1">
               <a:rPr lang="ru-RU" smtClean="0"/>
-              <a:t>09.04.2026</a:t>
+              <a:t>16.04.2026</a:t>
             </a:fld>
             <a:endParaRPr lang="ru-RU"/>
           </a:p>
@@ -2352,7 +2436,7 @@
           <a:p>
             <a:fld id="{B0455336-877F-4B9E-ABA0-711209675E90}" type="datetime1">
               <a:rPr lang="ru-RU" smtClean="0"/>
-              <a:t>09.04.2026</a:t>
+              <a:t>16.04.2026</a:t>
             </a:fld>
             <a:endParaRPr lang="ru-RU"/>
           </a:p>
@@ -2627,7 +2711,7 @@
           <a:p>
             <a:fld id="{4CD7FBEC-B4E5-42F6-9401-C269C822CB37}" type="datetime1">
               <a:rPr lang="ru-RU" smtClean="0"/>
-              <a:t>09.04.2026</a:t>
+              <a:t>16.04.2026</a:t>
             </a:fld>
             <a:endParaRPr lang="ru-RU"/>
           </a:p>
@@ -2879,7 +2963,7 @@
           <a:p>
             <a:fld id="{164E4ED0-DB39-4DEB-BDB8-65B049CA9302}" type="datetime1">
               <a:rPr lang="ru-RU" smtClean="0"/>
-              <a:t>09.04.2026</a:t>
+              <a:t>16.04.2026</a:t>
             </a:fld>
             <a:endParaRPr lang="ru-RU"/>
           </a:p>
@@ -3090,7 +3174,7 @@
           <a:p>
             <a:fld id="{7C87ADCC-E2E8-4FE7-9F77-8D106CD66237}" type="datetime1">
               <a:rPr lang="ru-RU" smtClean="0"/>
-              <a:t>09.04.2026</a:t>
+              <a:t>16.04.2026</a:t>
             </a:fld>
             <a:endParaRPr lang="ru-RU"/>
           </a:p>
@@ -5570,7 +5654,7 @@
           <p:nvPr/>
         </p:nvPicPr>
         <p:blipFill>
-          <a:blip r:embed="rId2"/>
+          <a:blip r:embed="rId3"/>
           <a:stretch>
             <a:fillRect/>
           </a:stretch>
@@ -5600,14 +5684,14 @@
           <p:nvPr/>
         </p:nvPicPr>
         <p:blipFill>
-          <a:blip r:embed="rId3"/>
+          <a:blip r:embed="rId4"/>
           <a:stretch>
             <a:fillRect/>
           </a:stretch>
         </p:blipFill>
         <p:spPr>
           <a:xfrm>
-            <a:off x="7464391" y="1562799"/>
+            <a:off x="8114312" y="1524298"/>
             <a:ext cx="2734376" cy="634375"/>
           </a:xfrm>
           <a:prstGeom prst="rect">
@@ -5630,15 +5714,15 @@
           <p:nvPr/>
         </p:nvPicPr>
         <p:blipFill>
-          <a:blip r:embed="rId4"/>
+          <a:blip r:embed="rId5"/>
           <a:stretch>
             <a:fillRect/>
           </a:stretch>
         </p:blipFill>
         <p:spPr>
           <a:xfrm>
-            <a:off x="2877952" y="2763293"/>
-            <a:ext cx="2147777" cy="1955140"/>
+            <a:off x="2803318" y="2695353"/>
+            <a:ext cx="2222411" cy="2023080"/>
           </a:xfrm>
           <a:prstGeom prst="rect">
             <a:avLst/>
@@ -5660,7 +5744,7 @@
           <p:nvPr/>
         </p:nvPicPr>
         <p:blipFill>
-          <a:blip r:embed="rId5"/>
+          <a:blip r:embed="rId6"/>
           <a:stretch>
             <a:fillRect/>
           </a:stretch>
@@ -5690,7 +5774,7 @@
           <p:nvPr/>
         </p:nvPicPr>
         <p:blipFill>
-          <a:blip r:embed="rId6"/>
+          <a:blip r:embed="rId7"/>
           <a:stretch>
             <a:fillRect/>
           </a:stretch>
@@ -5720,7 +5804,7 @@
           <p:nvPr/>
         </p:nvPicPr>
         <p:blipFill>
-          <a:blip r:embed="rId7"/>
+          <a:blip r:embed="rId8"/>
           <a:stretch>
             <a:fillRect/>
           </a:stretch>
@@ -5846,7 +5930,7 @@
           <p:nvPr>
             <p:extLst>
               <p:ext uri="{D42A27DB-BD31-4B8C-83A1-F6EECF244321}">
-                <p14:modId xmlns:p14="http://schemas.microsoft.com/office/powerpoint/2010/main" val="2440214309"/>
+                <p14:modId xmlns:p14="http://schemas.microsoft.com/office/powerpoint/2010/main" val="1568070612"/>
               </p:ext>
             </p:extLst>
           </p:nvPr>
@@ -6605,8 +6689,91 @@
         </p:blipFill>
         <p:spPr>
           <a:xfrm>
-            <a:off x="2413591" y="5809947"/>
+            <a:off x="7863416" y="5735519"/>
             <a:ext cx="3295520" cy="911527"/>
+          </a:xfrm>
+          <a:prstGeom prst="rect">
+            <a:avLst/>
+          </a:prstGeom>
+        </p:spPr>
+      </p:pic>
+      <p:sp>
+        <p:nvSpPr>
+          <p:cNvPr id="5" name="TextBox 4">
+            <a:extLst>
+              <a:ext uri="{FF2B5EF4-FFF2-40B4-BE49-F238E27FC236}">
+                <a16:creationId xmlns:a16="http://schemas.microsoft.com/office/drawing/2014/main" id="{7F54B037-102C-26A4-A16E-5735C34546C1}"/>
+              </a:ext>
+            </a:extLst>
+          </p:cNvPr>
+          <p:cNvSpPr txBox="1"/>
+          <p:nvPr/>
+        </p:nvSpPr>
+        <p:spPr>
+          <a:xfrm>
+            <a:off x="7863416" y="5399479"/>
+            <a:ext cx="3418368" cy="261610"/>
+          </a:xfrm>
+          <a:prstGeom prst="rect">
+            <a:avLst/>
+          </a:prstGeom>
+          <a:noFill/>
+        </p:spPr>
+        <p:txBody>
+          <a:bodyPr wrap="square" rtlCol="0">
+            <a:spAutoFit/>
+          </a:bodyPr>
+          <a:lstStyle/>
+          <a:p>
+            <a:pPr algn="ctr"/>
+            <a:r>
+              <a:rPr lang="ru-RU" sz="1100" dirty="0">
+                <a:solidFill>
+                  <a:schemeClr val="dk1"/>
+                </a:solidFill>
+              </a:rPr>
+              <a:t>Убран </a:t>
+            </a:r>
+            <a:r>
+              <a:rPr lang="en-US" sz="1100" dirty="0">
+                <a:solidFill>
+                  <a:schemeClr val="dk1"/>
+                </a:solidFill>
+              </a:rPr>
+              <a:t>const</a:t>
+            </a:r>
+            <a:endParaRPr lang="ru-RU" sz="1100" dirty="0">
+              <a:solidFill>
+                <a:schemeClr val="dk1"/>
+              </a:solidFill>
+            </a:endParaRPr>
+          </a:p>
+        </p:txBody>
+      </p:sp>
+      <p:pic>
+        <p:nvPicPr>
+          <p:cNvPr id="8" name="Рисунок 7">
+            <a:extLst>
+              <a:ext uri="{FF2B5EF4-FFF2-40B4-BE49-F238E27FC236}">
+                <a16:creationId xmlns:a16="http://schemas.microsoft.com/office/drawing/2014/main" id="{7C8ED7C8-098D-3E99-BF48-9A8C019C1237}"/>
+              </a:ext>
+            </a:extLst>
+          </p:cNvPr>
+          <p:cNvPicPr>
+            <a:picLocks noChangeAspect="1"/>
+          </p:cNvPicPr>
+          <p:nvPr/>
+        </p:nvPicPr>
+        <p:blipFill>
+          <a:blip r:embed="rId10"/>
+          <a:stretch>
+            <a:fillRect/>
+          </a:stretch>
+        </p:blipFill>
+        <p:spPr>
+          <a:xfrm>
+            <a:off x="1592232" y="6032455"/>
+            <a:ext cx="4791744" cy="323895"/>
           </a:xfrm>
           <a:prstGeom prst="rect">
             <a:avLst/>
